--- a/питчинг 16.03.pptx
+++ b/питчинг 16.03.pptx
@@ -5,7 +5,7 @@
     <p:sldMasterId id="2147483684" r:id="rId1"/>
   </p:sldMasterIdLst>
   <p:notesMasterIdLst>
-    <p:notesMasterId r:id="rId9"/>
+    <p:notesMasterId r:id="rId8"/>
   </p:notesMasterIdLst>
   <p:sldIdLst>
     <p:sldId id="256" r:id="rId2"/>
@@ -13,8 +13,7 @@
     <p:sldId id="258" r:id="rId4"/>
     <p:sldId id="260" r:id="rId5"/>
     <p:sldId id="261" r:id="rId6"/>
-    <p:sldId id="262" r:id="rId7"/>
-    <p:sldId id="264" r:id="rId8"/>
+    <p:sldId id="264" r:id="rId7"/>
   </p:sldIdLst>
   <p:sldSz cx="12192000" cy="6858000"/>
   <p:notesSz cx="6858000" cy="9144000"/>
@@ -7828,11 +7827,7 @@
             </a:r>
             <a:r>
               <a:rPr lang="ru-RU" dirty="0" smtClean="0"/>
-              <a:t>он решил уволиться</a:t>
-            </a:r>
-            <a:r>
-              <a:rPr lang="ru-RU" dirty="0" smtClean="0"/>
-              <a:t>. </a:t>
+              <a:t>он решил уволиться. </a:t>
             </a:r>
             <a:r>
               <a:rPr lang="ru-RU" dirty="0"/>
@@ -7852,11 +7847,7 @@
             </a:r>
             <a:r>
               <a:rPr lang="ru-RU" b="1" dirty="0" smtClean="0"/>
-              <a:t>тот</a:t>
-            </a:r>
-            <a:r>
-              <a:rPr lang="ru-RU" b="1" dirty="0" smtClean="0"/>
-              <a:t> </a:t>
+              <a:t>тот </a:t>
             </a:r>
             <a:r>
               <a:rPr lang="ru-RU" b="1" dirty="0"/>
@@ -7951,7 +7942,7 @@
         </p:blipFill>
         <p:spPr bwMode="auto">
           <a:xfrm>
-            <a:off x="7566409" y="3534586"/>
+            <a:off x="7486022" y="3233135"/>
             <a:ext cx="2723101" cy="2723101"/>
           </a:xfrm>
           <a:prstGeom prst="rect">
@@ -8020,7 +8011,7 @@
         </p:blipFill>
         <p:spPr bwMode="auto">
           <a:xfrm>
-            <a:off x="8958002" y="2686098"/>
+            <a:off x="8980763" y="2394696"/>
             <a:ext cx="2989488" cy="2989489"/>
           </a:xfrm>
           <a:prstGeom prst="rect">
@@ -8103,11 +8094,7 @@
             </a:r>
             <a:r>
               <a:rPr lang="ru-RU" dirty="0" smtClean="0"/>
-              <a:t>	</a:t>
-            </a:r>
-            <a:r>
-              <a:rPr lang="ru-RU" dirty="0" smtClean="0"/>
-              <a:t>и стилистика</a:t>
+              <a:t>	и стилистика</a:t>
             </a:r>
             <a:endParaRPr lang="ru-RU" dirty="0"/>
           </a:p>
@@ -8167,11 +8154,7 @@
             </a:pPr>
             <a:r>
               <a:rPr lang="ru-RU" dirty="0" smtClean="0"/>
-              <a:t>Мир </a:t>
-            </a:r>
-            <a:r>
-              <a:rPr lang="ru-RU" dirty="0" smtClean="0"/>
-              <a:t>состоит из </a:t>
+              <a:t>Мир состоит из </a:t>
             </a:r>
             <a:r>
               <a:rPr lang="ru-RU" b="1" dirty="0" smtClean="0"/>
@@ -8266,15 +8249,7 @@
             </a:r>
             <a:r>
               <a:rPr lang="ru-RU" dirty="0" smtClean="0"/>
-              <a:t>обслуживать клиентов, находить на локациях новые </a:t>
-            </a:r>
-            <a:r>
-              <a:rPr lang="ru-RU" dirty="0" smtClean="0"/>
-              <a:t>рецепты, </a:t>
-            </a:r>
-            <a:r>
-              <a:rPr lang="ru-RU" dirty="0" smtClean="0"/>
-              <a:t>помещать в ограниченный инвентарь ингредиенты с локаций и объединять их в блюда для гостей</a:t>
+              <a:t>обслуживать клиентов, находить на локациях новые рецепты, помещать в ограниченный инвентарь ингредиенты с локаций и объединять их в блюда для гостей</a:t>
             </a:r>
             <a:endParaRPr lang="ru-RU" dirty="0"/>
           </a:p>
@@ -8557,7 +8532,7 @@
                   </a:prstClr>
                 </a:solidFill>
               </a:rPr>
-              <a:t>. Гость описывает, чего хочет, а игрок выбирает рецепт из всех ему доступных. Если ошибся, то гость теряет одно значение терпения и может уйти при нулевом </a:t>
+              <a:t>. Гость описывает, чего хочет, а игрок выбирает рецепт из всех ему доступных. Если ошибся, то гость теряет одно значение терпения и </a:t>
             </a:r>
             <a:r>
               <a:rPr lang="ru-RU" sz="2000" dirty="0" smtClean="0">
@@ -8568,7 +8543,29 @@
                   </a:prstClr>
                 </a:solidFill>
               </a:rPr>
-              <a:t>его значении, </a:t>
+              <a:t>у</a:t>
+            </a:r>
+            <a:r>
+              <a:rPr lang="ru-RU" sz="2000" dirty="0" smtClean="0">
+                <a:solidFill>
+                  <a:prstClr val="black">
+                    <a:lumMod val="65000"/>
+                    <a:lumOff val="35000"/>
+                  </a:prstClr>
+                </a:solidFill>
+              </a:rPr>
+              <a:t>ходит когда терпение кончается</a:t>
+            </a:r>
+            <a:r>
+              <a:rPr lang="ru-RU" sz="2000" dirty="0" smtClean="0">
+                <a:solidFill>
+                  <a:prstClr val="black">
+                    <a:lumMod val="65000"/>
+                    <a:lumOff val="35000"/>
+                  </a:prstClr>
+                </a:solidFill>
+              </a:rPr>
+              <a:t>, </a:t>
             </a:r>
             <a:r>
               <a:rPr lang="ru-RU" sz="2000" dirty="0">
@@ -8817,15 +8814,7 @@
             </a:r>
             <a:r>
               <a:rPr lang="ru-RU" dirty="0" smtClean="0"/>
-              <a:t>грок </a:t>
-            </a:r>
-            <a:r>
-              <a:rPr lang="ru-RU" dirty="0" smtClean="0"/>
-              <a:t>собрал по ходу прохождения сюжета новый рецепт и обслужил необходимый минимум </a:t>
-            </a:r>
-            <a:r>
-              <a:rPr lang="ru-RU" dirty="0" smtClean="0"/>
-              <a:t>клиентов</a:t>
+              <a:t>грок собрал по ходу прохождения сюжета новый рецепт и обслужил необходимый минимум клиентов</a:t>
             </a:r>
             <a:endParaRPr lang="ru-RU" dirty="0"/>
           </a:p>
@@ -8844,15 +8833,7 @@
             </a:r>
             <a:r>
               <a:rPr lang="ru-RU" dirty="0" smtClean="0"/>
-              <a:t>игрок обслужил всех клиентов в заведении. Ярость, </a:t>
-            </a:r>
-            <a:r>
-              <a:rPr lang="ru-RU" dirty="0" smtClean="0"/>
-              <a:t>накопленная после рабочего дня заставила бросить в босса тарелку с новым блюдом для </a:t>
-            </a:r>
-            <a:r>
-              <a:rPr lang="ru-RU" dirty="0" smtClean="0"/>
-              <a:t>меню</a:t>
+              <a:t>игрок обслужил всех клиентов в заведении. Ярость, накопленная после рабочего дня заставила бросить в босса тарелку с новым блюдом для меню</a:t>
             </a:r>
             <a:endParaRPr lang="ru-RU" dirty="0"/>
           </a:p>
@@ -8992,128 +8973,6 @@
 </file>
 
 <file path=ppt/slides/slide6.xml><?xml version="1.0" encoding="utf-8"?>
-<p:sld xmlns:a="http://schemas.openxmlformats.org/drawingml/2006/main" xmlns:r="http://schemas.openxmlformats.org/officeDocument/2006/relationships" xmlns:p="http://schemas.openxmlformats.org/presentationml/2006/main">
-  <p:cSld>
-    <p:spTree>
-      <p:nvGrpSpPr>
-        <p:cNvPr id="1" name=""/>
-        <p:cNvGrpSpPr/>
-        <p:nvPr/>
-      </p:nvGrpSpPr>
-      <p:grpSpPr>
-        <a:xfrm>
-          <a:off x="0" y="0"/>
-          <a:ext cx="0" cy="0"/>
-          <a:chOff x="0" y="0"/>
-          <a:chExt cx="0" cy="0"/>
-        </a:xfrm>
-      </p:grpSpPr>
-      <p:sp>
-        <p:nvSpPr>
-          <p:cNvPr id="2" name="Заголовок 1"/>
-          <p:cNvSpPr>
-            <a:spLocks noGrp="1"/>
-          </p:cNvSpPr>
-          <p:nvPr>
-            <p:ph type="title"/>
-          </p:nvPr>
-        </p:nvSpPr>
-        <p:spPr/>
-        <p:txBody>
-          <a:bodyPr/>
-          <a:lstStyle/>
-          <a:p>
-            <a:pPr algn="ctr"/>
-            <a:r>
-              <a:rPr lang="ru-RU" dirty="0" smtClean="0"/>
-              <a:t/>
-            </a:r>
-            <a:br>
-              <a:rPr lang="ru-RU" dirty="0" smtClean="0"/>
-            </a:br>
-            <a:r>
-              <a:rPr lang="ru-RU" dirty="0" smtClean="0"/>
-              <a:t>Целевая аудитория</a:t>
-            </a:r>
-            <a:endParaRPr lang="ru-RU" dirty="0"/>
-          </a:p>
-        </p:txBody>
-      </p:sp>
-      <p:sp>
-        <p:nvSpPr>
-          <p:cNvPr id="3" name="Объект 2"/>
-          <p:cNvSpPr>
-            <a:spLocks noGrp="1"/>
-          </p:cNvSpPr>
-          <p:nvPr>
-            <p:ph idx="1"/>
-          </p:nvPr>
-        </p:nvSpPr>
-        <p:spPr/>
-        <p:txBody>
-          <a:bodyPr/>
-          <a:lstStyle/>
-          <a:p>
-            <a:pPr marL="0" indent="0">
-              <a:buNone/>
-            </a:pPr>
-            <a:r>
-              <a:rPr lang="ru-RU" dirty="0"/>
-              <a:t>Игра для фанатов текстовых квестов, любителей головоломок и тех, кому </a:t>
-            </a:r>
-            <a:r>
-              <a:rPr lang="ru-RU" dirty="0" smtClean="0"/>
-              <a:t>близка тема поиска выхода из плохих условий труда</a:t>
-            </a:r>
-            <a:endParaRPr lang="ru-RU" dirty="0"/>
-          </a:p>
-        </p:txBody>
-      </p:sp>
-      <p:pic>
-        <p:nvPicPr>
-          <p:cNvPr id="4" name="Рисунок 3"/>
-          <p:cNvPicPr>
-            <a:picLocks noChangeAspect="1"/>
-          </p:cNvPicPr>
-          <p:nvPr/>
-        </p:nvPicPr>
-        <p:blipFill>
-          <a:blip r:embed="rId2"/>
-          <a:stretch>
-            <a:fillRect/>
-          </a:stretch>
-        </p:blipFill>
-        <p:spPr>
-          <a:xfrm>
-            <a:off x="3789754" y="3147254"/>
-            <a:ext cx="5102170" cy="3468097"/>
-          </a:xfrm>
-          <a:prstGeom prst="rect">
-            <a:avLst/>
-          </a:prstGeom>
-        </p:spPr>
-      </p:pic>
-    </p:spTree>
-    <p:extLst>
-      <p:ext uri="{BB962C8B-B14F-4D97-AF65-F5344CB8AC3E}">
-        <p14:creationId xmlns:p14="http://schemas.microsoft.com/office/powerpoint/2010/main" val="2390682827"/>
-      </p:ext>
-    </p:extLst>
-  </p:cSld>
-  <p:clrMapOvr>
-    <a:masterClrMapping/>
-  </p:clrMapOvr>
-  <p:timing>
-    <p:tnLst>
-      <p:par>
-        <p:cTn id="1" dur="indefinite" restart="never" nodeType="tmRoot"/>
-      </p:par>
-    </p:tnLst>
-  </p:timing>
-</p:sld>
-</file>
-
-<file path=ppt/slides/slide7.xml><?xml version="1.0" encoding="utf-8"?>
 <p:sld xmlns:a="http://schemas.openxmlformats.org/drawingml/2006/main" xmlns:r="http://schemas.openxmlformats.org/officeDocument/2006/relationships" xmlns:p="http://schemas.openxmlformats.org/presentationml/2006/main">
   <p:cSld>
     <p:spTree>

--- a/питчинг 16.03.pptx
+++ b/питчинг 16.03.pptx
@@ -5,15 +5,10 @@
     <p:sldMasterId id="2147483684" r:id="rId1"/>
   </p:sldMasterIdLst>
   <p:notesMasterIdLst>
-    <p:notesMasterId r:id="rId8"/>
+    <p:notesMasterId r:id="rId3"/>
   </p:notesMasterIdLst>
   <p:sldIdLst>
-    <p:sldId id="256" r:id="rId2"/>
-    <p:sldId id="257" r:id="rId3"/>
-    <p:sldId id="258" r:id="rId4"/>
-    <p:sldId id="260" r:id="rId5"/>
-    <p:sldId id="261" r:id="rId6"/>
-    <p:sldId id="264" r:id="rId7"/>
+    <p:sldId id="262" r:id="rId2"/>
   </p:sldIdLst>
   <p:sldSz cx="12192000" cy="6858000"/>
   <p:notesSz cx="6858000" cy="9144000"/>
@@ -468,295 +463,6 @@
     </a:lvl9pPr>
   </p:notesStyle>
 </p:notesMaster>
-</file>
-
-<file path=ppt/notesSlides/notesSlide1.xml><?xml version="1.0" encoding="utf-8"?>
-<p:notes xmlns:a="http://schemas.openxmlformats.org/drawingml/2006/main" xmlns:r="http://schemas.openxmlformats.org/officeDocument/2006/relationships" xmlns:p="http://schemas.openxmlformats.org/presentationml/2006/main">
-  <p:cSld>
-    <p:spTree>
-      <p:nvGrpSpPr>
-        <p:cNvPr id="1" name=""/>
-        <p:cNvGrpSpPr/>
-        <p:nvPr/>
-      </p:nvGrpSpPr>
-      <p:grpSpPr>
-        <a:xfrm>
-          <a:off x="0" y="0"/>
-          <a:ext cx="0" cy="0"/>
-          <a:chOff x="0" y="0"/>
-          <a:chExt cx="0" cy="0"/>
-        </a:xfrm>
-      </p:grpSpPr>
-      <p:sp>
-        <p:nvSpPr>
-          <p:cNvPr id="2" name="Образ слайда 1"/>
-          <p:cNvSpPr>
-            <a:spLocks noGrp="1" noRot="1" noChangeAspect="1"/>
-          </p:cNvSpPr>
-          <p:nvPr>
-            <p:ph type="sldImg"/>
-          </p:nvPr>
-        </p:nvSpPr>
-        <p:spPr/>
-      </p:sp>
-      <p:sp>
-        <p:nvSpPr>
-          <p:cNvPr id="3" name="Заметки 2"/>
-          <p:cNvSpPr>
-            <a:spLocks noGrp="1"/>
-          </p:cNvSpPr>
-          <p:nvPr>
-            <p:ph type="body" idx="1"/>
-          </p:nvPr>
-        </p:nvSpPr>
-        <p:spPr/>
-        <p:txBody>
-          <a:bodyPr/>
-          <a:lstStyle/>
-          <a:p>
-            <a:pPr marL="0" marR="0" indent="0" algn="l" defTabSz="914400" rtl="0" eaLnBrk="1" fontAlgn="auto" latinLnBrk="0" hangingPunct="1">
-              <a:lnSpc>
-                <a:spcPct val="100000"/>
-              </a:lnSpc>
-              <a:spcBef>
-                <a:spcPts val="0"/>
-              </a:spcBef>
-              <a:spcAft>
-                <a:spcPts val="0"/>
-              </a:spcAft>
-              <a:buClrTx/>
-              <a:buSzTx/>
-              <a:buFontTx/>
-              <a:buNone/>
-              <a:tabLst/>
-              <a:defRPr/>
-            </a:pPr>
-            <a:endParaRPr lang="ru-RU" dirty="0" smtClean="0"/>
-          </a:p>
-        </p:txBody>
-      </p:sp>
-      <p:sp>
-        <p:nvSpPr>
-          <p:cNvPr id="4" name="Номер слайда 3"/>
-          <p:cNvSpPr>
-            <a:spLocks noGrp="1"/>
-          </p:cNvSpPr>
-          <p:nvPr>
-            <p:ph type="sldNum" sz="quarter" idx="10"/>
-          </p:nvPr>
-        </p:nvSpPr>
-        <p:spPr/>
-        <p:txBody>
-          <a:bodyPr/>
-          <a:lstStyle/>
-          <a:p>
-            <a:fld id="{BDB38265-A06E-442C-9346-7B5C8B92724E}" type="slidenum">
-              <a:rPr lang="ru-RU" smtClean="0"/>
-              <a:t>2</a:t>
-            </a:fld>
-            <a:endParaRPr lang="ru-RU"/>
-          </a:p>
-        </p:txBody>
-      </p:sp>
-    </p:spTree>
-    <p:extLst>
-      <p:ext uri="{BB962C8B-B14F-4D97-AF65-F5344CB8AC3E}">
-        <p14:creationId xmlns:p14="http://schemas.microsoft.com/office/powerpoint/2010/main" val="892264415"/>
-      </p:ext>
-    </p:extLst>
-  </p:cSld>
-  <p:clrMapOvr>
-    <a:masterClrMapping/>
-  </p:clrMapOvr>
-</p:notes>
-</file>
-
-<file path=ppt/notesSlides/notesSlide2.xml><?xml version="1.0" encoding="utf-8"?>
-<p:notes xmlns:a="http://schemas.openxmlformats.org/drawingml/2006/main" xmlns:r="http://schemas.openxmlformats.org/officeDocument/2006/relationships" xmlns:p="http://schemas.openxmlformats.org/presentationml/2006/main">
-  <p:cSld>
-    <p:spTree>
-      <p:nvGrpSpPr>
-        <p:cNvPr id="1" name=""/>
-        <p:cNvGrpSpPr/>
-        <p:nvPr/>
-      </p:nvGrpSpPr>
-      <p:grpSpPr>
-        <a:xfrm>
-          <a:off x="0" y="0"/>
-          <a:ext cx="0" cy="0"/>
-          <a:chOff x="0" y="0"/>
-          <a:chExt cx="0" cy="0"/>
-        </a:xfrm>
-      </p:grpSpPr>
-      <p:sp>
-        <p:nvSpPr>
-          <p:cNvPr id="2" name="Образ слайда 1"/>
-          <p:cNvSpPr>
-            <a:spLocks noGrp="1" noRot="1" noChangeAspect="1"/>
-          </p:cNvSpPr>
-          <p:nvPr>
-            <p:ph type="sldImg"/>
-          </p:nvPr>
-        </p:nvSpPr>
-        <p:spPr/>
-      </p:sp>
-      <p:sp>
-        <p:nvSpPr>
-          <p:cNvPr id="3" name="Заметки 2"/>
-          <p:cNvSpPr>
-            <a:spLocks noGrp="1"/>
-          </p:cNvSpPr>
-          <p:nvPr>
-            <p:ph type="body" idx="1"/>
-          </p:nvPr>
-        </p:nvSpPr>
-        <p:spPr/>
-        <p:txBody>
-          <a:bodyPr/>
-          <a:lstStyle/>
-          <a:p>
-            <a:pPr marL="0" marR="0" indent="0" algn="l" defTabSz="914400" rtl="0" eaLnBrk="1" fontAlgn="auto" latinLnBrk="0" hangingPunct="1">
-              <a:lnSpc>
-                <a:spcPct val="100000"/>
-              </a:lnSpc>
-              <a:spcBef>
-                <a:spcPts val="0"/>
-              </a:spcBef>
-              <a:spcAft>
-                <a:spcPts val="0"/>
-              </a:spcAft>
-              <a:buClrTx/>
-              <a:buSzTx/>
-              <a:buFontTx/>
-              <a:buNone/>
-              <a:tabLst/>
-              <a:defRPr/>
-            </a:pPr>
-            <a:endParaRPr lang="ru-RU" dirty="0" smtClean="0"/>
-          </a:p>
-          <a:p>
-            <a:endParaRPr lang="ru-RU" dirty="0"/>
-          </a:p>
-        </p:txBody>
-      </p:sp>
-      <p:sp>
-        <p:nvSpPr>
-          <p:cNvPr id="4" name="Номер слайда 3"/>
-          <p:cNvSpPr>
-            <a:spLocks noGrp="1"/>
-          </p:cNvSpPr>
-          <p:nvPr>
-            <p:ph type="sldNum" sz="quarter" idx="10"/>
-          </p:nvPr>
-        </p:nvSpPr>
-        <p:spPr/>
-        <p:txBody>
-          <a:bodyPr/>
-          <a:lstStyle/>
-          <a:p>
-            <a:fld id="{BDB38265-A06E-442C-9346-7B5C8B92724E}" type="slidenum">
-              <a:rPr lang="ru-RU" smtClean="0"/>
-              <a:t>3</a:t>
-            </a:fld>
-            <a:endParaRPr lang="ru-RU"/>
-          </a:p>
-        </p:txBody>
-      </p:sp>
-    </p:spTree>
-    <p:extLst>
-      <p:ext uri="{BB962C8B-B14F-4D97-AF65-F5344CB8AC3E}">
-        <p14:creationId xmlns:p14="http://schemas.microsoft.com/office/powerpoint/2010/main" val="3136093172"/>
-      </p:ext>
-    </p:extLst>
-  </p:cSld>
-  <p:clrMapOvr>
-    <a:masterClrMapping/>
-  </p:clrMapOvr>
-</p:notes>
-</file>
-
-<file path=ppt/notesSlides/notesSlide3.xml><?xml version="1.0" encoding="utf-8"?>
-<p:notes xmlns:a="http://schemas.openxmlformats.org/drawingml/2006/main" xmlns:r="http://schemas.openxmlformats.org/officeDocument/2006/relationships" xmlns:p="http://schemas.openxmlformats.org/presentationml/2006/main">
-  <p:cSld>
-    <p:spTree>
-      <p:nvGrpSpPr>
-        <p:cNvPr id="1" name=""/>
-        <p:cNvGrpSpPr/>
-        <p:nvPr/>
-      </p:nvGrpSpPr>
-      <p:grpSpPr>
-        <a:xfrm>
-          <a:off x="0" y="0"/>
-          <a:ext cx="0" cy="0"/>
-          <a:chOff x="0" y="0"/>
-          <a:chExt cx="0" cy="0"/>
-        </a:xfrm>
-      </p:grpSpPr>
-      <p:sp>
-        <p:nvSpPr>
-          <p:cNvPr id="2" name="Образ слайда 1"/>
-          <p:cNvSpPr>
-            <a:spLocks noGrp="1" noRot="1" noChangeAspect="1"/>
-          </p:cNvSpPr>
-          <p:nvPr>
-            <p:ph type="sldImg"/>
-          </p:nvPr>
-        </p:nvSpPr>
-        <p:spPr/>
-      </p:sp>
-      <p:sp>
-        <p:nvSpPr>
-          <p:cNvPr id="3" name="Заметки 2"/>
-          <p:cNvSpPr>
-            <a:spLocks noGrp="1"/>
-          </p:cNvSpPr>
-          <p:nvPr>
-            <p:ph type="body" idx="1"/>
-          </p:nvPr>
-        </p:nvSpPr>
-        <p:spPr/>
-        <p:txBody>
-          <a:bodyPr/>
-          <a:lstStyle/>
-          <a:p>
-            <a:endParaRPr lang="ru-RU" dirty="0"/>
-          </a:p>
-        </p:txBody>
-      </p:sp>
-      <p:sp>
-        <p:nvSpPr>
-          <p:cNvPr id="4" name="Номер слайда 3"/>
-          <p:cNvSpPr>
-            <a:spLocks noGrp="1"/>
-          </p:cNvSpPr>
-          <p:nvPr>
-            <p:ph type="sldNum" sz="quarter" idx="10"/>
-          </p:nvPr>
-        </p:nvSpPr>
-        <p:spPr/>
-        <p:txBody>
-          <a:bodyPr/>
-          <a:lstStyle/>
-          <a:p>
-            <a:fld id="{BDB38265-A06E-442C-9346-7B5C8B92724E}" type="slidenum">
-              <a:rPr lang="ru-RU" smtClean="0"/>
-              <a:t>4</a:t>
-            </a:fld>
-            <a:endParaRPr lang="ru-RU"/>
-          </a:p>
-        </p:txBody>
-      </p:sp>
-    </p:spTree>
-    <p:extLst>
-      <p:ext uri="{BB962C8B-B14F-4D97-AF65-F5344CB8AC3E}">
-        <p14:creationId xmlns:p14="http://schemas.microsoft.com/office/powerpoint/2010/main" val="92304033"/>
-      </p:ext>
-    </p:extLst>
-  </p:cSld>
-  <p:clrMapOvr>
-    <a:masterClrMapping/>
-  </p:clrMapOvr>
-</p:notes>
 </file>
 
 <file path=ppt/slideLayouts/slideLayout1.xml><?xml version="1.0" encoding="utf-8"?>
@@ -7472,458 +7178,20 @@
           <a:chExt cx="0" cy="0"/>
         </a:xfrm>
       </p:grpSpPr>
-      <p:sp>
-        <p:nvSpPr>
-          <p:cNvPr id="2" name="Заголовок 1"/>
-          <p:cNvSpPr>
-            <a:spLocks noGrp="1"/>
-          </p:cNvSpPr>
-          <p:nvPr>
-            <p:ph type="ctrTitle"/>
-          </p:nvPr>
-        </p:nvSpPr>
-        <p:spPr/>
-        <p:txBody>
-          <a:bodyPr/>
-          <a:lstStyle/>
-          <a:p>
-            <a:r>
-              <a:rPr lang="en-US" dirty="0" smtClean="0"/>
-              <a:t>Plate of Fate</a:t>
-            </a:r>
-            <a:endParaRPr lang="ru-RU" dirty="0"/>
-          </a:p>
-        </p:txBody>
-      </p:sp>
-      <p:sp>
-        <p:nvSpPr>
-          <p:cNvPr id="4" name="Подзаголовок 2"/>
-          <p:cNvSpPr txBox="1">
-            <a:spLocks/>
-          </p:cNvSpPr>
-          <p:nvPr/>
-        </p:nvSpPr>
-        <p:spPr>
-          <a:xfrm>
-            <a:off x="2215045" y="6115721"/>
-            <a:ext cx="8045373" cy="742279"/>
-          </a:xfrm>
-          <a:prstGeom prst="rect">
-            <a:avLst/>
-          </a:prstGeom>
-        </p:spPr>
-        <p:txBody>
-          <a:bodyPr vert="horz" lIns="91440" tIns="45720" rIns="91440" bIns="45720" rtlCol="0" anchor="t">
-            <a:normAutofit/>
-          </a:bodyPr>
-          <a:lstStyle>
-            <a:lvl1pPr marL="0" indent="0" algn="ctr" defTabSz="914400" rtl="0" eaLnBrk="1" latinLnBrk="0" hangingPunct="1">
-              <a:lnSpc>
-                <a:spcPct val="100000"/>
-              </a:lnSpc>
-              <a:spcBef>
-                <a:spcPts val="700"/>
-              </a:spcBef>
-              <a:buClr>
-                <a:schemeClr val="tx2"/>
-              </a:buClr>
-              <a:buFont typeface="Arial" panose="020B0604020202020204" pitchFamily="34" charset="0"/>
-              <a:buNone/>
-              <a:defRPr sz="2000" b="1" i="0" kern="1200" cap="all" spc="400" baseline="0">
-                <a:solidFill>
-                  <a:schemeClr val="tx2"/>
-                </a:solidFill>
-                <a:latin typeface="+mn-lt"/>
-                <a:ea typeface="+mn-ea"/>
-                <a:cs typeface="+mn-cs"/>
-              </a:defRPr>
-            </a:lvl1pPr>
-            <a:lvl2pPr marL="457200" indent="0" algn="ctr" defTabSz="914400" rtl="0" eaLnBrk="1" latinLnBrk="0" hangingPunct="1">
-              <a:lnSpc>
-                <a:spcPct val="110000"/>
-              </a:lnSpc>
-              <a:spcBef>
-                <a:spcPts val="700"/>
-              </a:spcBef>
-              <a:buClr>
-                <a:schemeClr val="tx2"/>
-              </a:buClr>
-              <a:buFont typeface="Gill Sans MT" panose="020B0502020104020203" pitchFamily="34" charset="0"/>
-              <a:buNone/>
-              <a:defRPr sz="2000" kern="1200">
-                <a:solidFill>
-                  <a:schemeClr val="tx1">
-                    <a:lumMod val="65000"/>
-                    <a:lumOff val="35000"/>
-                  </a:schemeClr>
-                </a:solidFill>
-                <a:latin typeface="+mn-lt"/>
-                <a:ea typeface="+mn-ea"/>
-                <a:cs typeface="+mn-cs"/>
-              </a:defRPr>
-            </a:lvl2pPr>
-            <a:lvl3pPr marL="914400" indent="0" algn="ctr" defTabSz="914400" rtl="0" eaLnBrk="1" latinLnBrk="0" hangingPunct="1">
-              <a:lnSpc>
-                <a:spcPct val="110000"/>
-              </a:lnSpc>
-              <a:spcBef>
-                <a:spcPts val="700"/>
-              </a:spcBef>
-              <a:buClr>
-                <a:schemeClr val="tx2"/>
-              </a:buClr>
-              <a:buFont typeface="Arial" panose="020B0604020202020204" pitchFamily="34" charset="0"/>
-              <a:buNone/>
-              <a:defRPr sz="1800" kern="1200">
-                <a:solidFill>
-                  <a:schemeClr val="tx1">
-                    <a:lumMod val="65000"/>
-                    <a:lumOff val="35000"/>
-                  </a:schemeClr>
-                </a:solidFill>
-                <a:latin typeface="+mn-lt"/>
-                <a:ea typeface="+mn-ea"/>
-                <a:cs typeface="+mn-cs"/>
-              </a:defRPr>
-            </a:lvl3pPr>
-            <a:lvl4pPr marL="1371600" indent="0" algn="ctr" defTabSz="914400" rtl="0" eaLnBrk="1" latinLnBrk="0" hangingPunct="1">
-              <a:lnSpc>
-                <a:spcPct val="110000"/>
-              </a:lnSpc>
-              <a:spcBef>
-                <a:spcPts val="700"/>
-              </a:spcBef>
-              <a:buClr>
-                <a:schemeClr val="tx2"/>
-              </a:buClr>
-              <a:buFont typeface="Gill Sans MT" panose="020B0502020104020203" pitchFamily="34" charset="0"/>
-              <a:buNone/>
-              <a:defRPr sz="1600" kern="1200">
-                <a:solidFill>
-                  <a:schemeClr val="tx1">
-                    <a:lumMod val="65000"/>
-                    <a:lumOff val="35000"/>
-                  </a:schemeClr>
-                </a:solidFill>
-                <a:latin typeface="+mn-lt"/>
-                <a:ea typeface="+mn-ea"/>
-                <a:cs typeface="+mn-cs"/>
-              </a:defRPr>
-            </a:lvl4pPr>
-            <a:lvl5pPr marL="1828800" indent="0" algn="ctr" defTabSz="914400" rtl="0" eaLnBrk="1" latinLnBrk="0" hangingPunct="1">
-              <a:lnSpc>
-                <a:spcPct val="110000"/>
-              </a:lnSpc>
-              <a:spcBef>
-                <a:spcPts val="700"/>
-              </a:spcBef>
-              <a:buClr>
-                <a:schemeClr val="tx2"/>
-              </a:buClr>
-              <a:buFont typeface="Arial" panose="020B0604020202020204" pitchFamily="34" charset="0"/>
-              <a:buNone/>
-              <a:defRPr sz="1600" kern="1200">
-                <a:solidFill>
-                  <a:schemeClr val="tx1">
-                    <a:lumMod val="65000"/>
-                    <a:lumOff val="35000"/>
-                  </a:schemeClr>
-                </a:solidFill>
-                <a:latin typeface="+mn-lt"/>
-                <a:ea typeface="+mn-ea"/>
-                <a:cs typeface="+mn-cs"/>
-              </a:defRPr>
-            </a:lvl5pPr>
-            <a:lvl6pPr marL="2286000" indent="0" algn="ctr" defTabSz="914400" rtl="0" eaLnBrk="1" latinLnBrk="0" hangingPunct="1">
-              <a:lnSpc>
-                <a:spcPct val="110000"/>
-              </a:lnSpc>
-              <a:spcBef>
-                <a:spcPts val="700"/>
-              </a:spcBef>
-              <a:buClr>
-                <a:schemeClr val="tx2"/>
-              </a:buClr>
-              <a:buFont typeface="Gill Sans MT" panose="020B0502020104020203" pitchFamily="34" charset="0"/>
-              <a:buNone/>
-              <a:defRPr sz="1600" kern="1200">
-                <a:solidFill>
-                  <a:schemeClr val="tx1">
-                    <a:lumMod val="65000"/>
-                    <a:lumOff val="35000"/>
-                  </a:schemeClr>
-                </a:solidFill>
-                <a:latin typeface="+mn-lt"/>
-                <a:ea typeface="+mn-ea"/>
-                <a:cs typeface="+mn-cs"/>
-              </a:defRPr>
-            </a:lvl6pPr>
-            <a:lvl7pPr marL="2743200" indent="0" algn="ctr" defTabSz="914400" rtl="0" eaLnBrk="1" latinLnBrk="0" hangingPunct="1">
-              <a:lnSpc>
-                <a:spcPct val="110000"/>
-              </a:lnSpc>
-              <a:spcBef>
-                <a:spcPts val="700"/>
-              </a:spcBef>
-              <a:buClr>
-                <a:schemeClr val="tx2"/>
-              </a:buClr>
-              <a:buFont typeface="Arial" panose="020B0604020202020204" pitchFamily="34" charset="0"/>
-              <a:buNone/>
-              <a:defRPr sz="1600" kern="1200">
-                <a:solidFill>
-                  <a:schemeClr val="tx1">
-                    <a:lumMod val="65000"/>
-                    <a:lumOff val="35000"/>
-                  </a:schemeClr>
-                </a:solidFill>
-                <a:latin typeface="+mn-lt"/>
-                <a:ea typeface="+mn-ea"/>
-                <a:cs typeface="+mn-cs"/>
-              </a:defRPr>
-            </a:lvl7pPr>
-            <a:lvl8pPr marL="3200400" indent="0" algn="ctr" defTabSz="914400" rtl="0" eaLnBrk="1" latinLnBrk="0" hangingPunct="1">
-              <a:lnSpc>
-                <a:spcPct val="110000"/>
-              </a:lnSpc>
-              <a:spcBef>
-                <a:spcPts val="700"/>
-              </a:spcBef>
-              <a:buClr>
-                <a:schemeClr val="tx2"/>
-              </a:buClr>
-              <a:buFont typeface="Gill Sans MT" panose="020B0502020104020203" pitchFamily="34" charset="0"/>
-              <a:buNone/>
-              <a:defRPr sz="1600" kern="1200" baseline="0">
-                <a:solidFill>
-                  <a:schemeClr val="tx1">
-                    <a:lumMod val="65000"/>
-                    <a:lumOff val="35000"/>
-                  </a:schemeClr>
-                </a:solidFill>
-                <a:latin typeface="+mn-lt"/>
-                <a:ea typeface="+mn-ea"/>
-                <a:cs typeface="+mn-cs"/>
-              </a:defRPr>
-            </a:lvl8pPr>
-            <a:lvl9pPr marL="3657600" indent="0" algn="ctr" defTabSz="914400" rtl="0" eaLnBrk="1" latinLnBrk="0" hangingPunct="1">
-              <a:lnSpc>
-                <a:spcPct val="110000"/>
-              </a:lnSpc>
-              <a:spcBef>
-                <a:spcPts val="700"/>
-              </a:spcBef>
-              <a:buClr>
-                <a:schemeClr val="tx2"/>
-              </a:buClr>
-              <a:buFont typeface="Arial" panose="020B0604020202020204" pitchFamily="34" charset="0"/>
-              <a:buNone/>
-              <a:defRPr sz="1600" kern="1200" baseline="0">
-                <a:solidFill>
-                  <a:schemeClr val="tx1">
-                    <a:lumMod val="65000"/>
-                    <a:lumOff val="35000"/>
-                  </a:schemeClr>
-                </a:solidFill>
-                <a:latin typeface="+mn-lt"/>
-                <a:ea typeface="+mn-ea"/>
-                <a:cs typeface="+mn-cs"/>
-              </a:defRPr>
-            </a:lvl9pPr>
-          </a:lstStyle>
-          <a:p>
-            <a:r>
-              <a:rPr lang="ru-RU" dirty="0" smtClean="0"/>
-              <a:t>Сбежать из общепита</a:t>
-            </a:r>
-          </a:p>
-        </p:txBody>
-      </p:sp>
-    </p:spTree>
-    <p:extLst>
-      <p:ext uri="{BB962C8B-B14F-4D97-AF65-F5344CB8AC3E}">
-        <p14:creationId xmlns:p14="http://schemas.microsoft.com/office/powerpoint/2010/main" val="1434883473"/>
-      </p:ext>
-    </p:extLst>
-  </p:cSld>
-  <p:clrMapOvr>
-    <a:masterClrMapping/>
-  </p:clrMapOvr>
-  <p:timing>
-    <p:tnLst>
-      <p:par>
-        <p:cTn id="1" dur="indefinite" restart="never" nodeType="tmRoot"/>
-      </p:par>
-    </p:tnLst>
-  </p:timing>
-</p:sld>
-</file>
-
-<file path=ppt/slides/slide2.xml><?xml version="1.0" encoding="utf-8"?>
-<p:sld xmlns:a="http://schemas.openxmlformats.org/drawingml/2006/main" xmlns:r="http://schemas.openxmlformats.org/officeDocument/2006/relationships" xmlns:p="http://schemas.openxmlformats.org/presentationml/2006/main">
-  <p:cSld>
-    <p:spTree>
-      <p:nvGrpSpPr>
-        <p:cNvPr id="1" name=""/>
-        <p:cNvGrpSpPr/>
-        <p:nvPr/>
-      </p:nvGrpSpPr>
-      <p:grpSpPr>
-        <a:xfrm>
-          <a:off x="0" y="0"/>
-          <a:ext cx="0" cy="0"/>
-          <a:chOff x="0" y="0"/>
-          <a:chExt cx="0" cy="0"/>
-        </a:xfrm>
-      </p:grpSpPr>
-      <p:sp>
-        <p:nvSpPr>
-          <p:cNvPr id="3" name="Объект 2"/>
-          <p:cNvSpPr>
-            <a:spLocks noGrp="1"/>
-          </p:cNvSpPr>
-          <p:nvPr>
-            <p:ph idx="1"/>
-          </p:nvPr>
-        </p:nvSpPr>
-        <p:spPr>
-          <a:xfrm>
-            <a:off x="1251678" y="1589656"/>
-            <a:ext cx="9490213" cy="5418051"/>
-          </a:xfrm>
-        </p:spPr>
-        <p:txBody>
-          <a:bodyPr>
-            <a:normAutofit/>
-          </a:bodyPr>
-          <a:lstStyle/>
-          <a:p>
-            <a:pPr marL="0" indent="0">
-              <a:buNone/>
-            </a:pPr>
-            <a:r>
-              <a:rPr lang="ru-RU" b="1" dirty="0"/>
-              <a:t>Главный герой – повар в ресторане</a:t>
-            </a:r>
-            <a:r>
-              <a:rPr lang="ru-RU" dirty="0"/>
-              <a:t>. </a:t>
-            </a:r>
-            <a:r>
-              <a:rPr lang="ru-RU" dirty="0" smtClean="0"/>
-              <a:t>Долгие </a:t>
-            </a:r>
-            <a:r>
-              <a:rPr lang="ru-RU" dirty="0"/>
-              <a:t>годы, не жалея себя, он работал на благо развития </a:t>
-            </a:r>
-            <a:r>
-              <a:rPr lang="ru-RU" dirty="0" smtClean="0"/>
-              <a:t>заведения, </a:t>
-            </a:r>
-            <a:r>
-              <a:rPr lang="ru-RU" dirty="0"/>
-              <a:t>но сейчас </a:t>
-            </a:r>
-            <a:r>
-              <a:rPr lang="ru-RU" dirty="0" smtClean="0"/>
-              <a:t>он решил уволиться. </a:t>
-            </a:r>
-            <a:r>
-              <a:rPr lang="ru-RU" dirty="0"/>
-              <a:t>Однако шеф не хочет терять хороших сотрудников, поэтому </a:t>
-            </a:r>
-            <a:r>
-              <a:rPr lang="ru-RU" dirty="0" smtClean="0"/>
-              <a:t>позволит </a:t>
-            </a:r>
-            <a:r>
-              <a:rPr lang="ru-RU" dirty="0"/>
-              <a:t>повару уйти </a:t>
-            </a:r>
-            <a:r>
-              <a:rPr lang="ru-RU" b="1" dirty="0"/>
-              <a:t>только если </a:t>
-            </a:r>
-            <a:r>
-              <a:rPr lang="ru-RU" b="1" dirty="0" smtClean="0"/>
-              <a:t>тот </a:t>
-            </a:r>
-            <a:r>
-              <a:rPr lang="ru-RU" b="1" dirty="0"/>
-              <a:t>обслужит достаточно клиентов и придумает новое блюдо в меню</a:t>
-            </a:r>
-            <a:r>
-              <a:rPr lang="ru-RU" dirty="0"/>
-              <a:t>. </a:t>
-            </a:r>
-            <a:endParaRPr lang="ru-RU" dirty="0" smtClean="0"/>
-          </a:p>
-          <a:p>
-            <a:pPr marL="0" indent="0">
-              <a:buNone/>
-            </a:pPr>
-            <a:endParaRPr lang="ru-RU" dirty="0"/>
-          </a:p>
-          <a:p>
-            <a:pPr marL="0" indent="0">
-              <a:buNone/>
-            </a:pPr>
-            <a:endParaRPr lang="ru-RU" dirty="0" smtClean="0"/>
-          </a:p>
-          <a:p>
-            <a:pPr marL="0" indent="0">
-              <a:buNone/>
-            </a:pPr>
-            <a:endParaRPr lang="ru-RU" dirty="0"/>
-          </a:p>
-          <a:p>
-            <a:pPr marL="0" indent="0">
-              <a:buNone/>
-            </a:pPr>
-            <a:endParaRPr lang="ru-RU" dirty="0" smtClean="0"/>
-          </a:p>
-          <a:p>
-            <a:pPr marL="0" indent="0">
-              <a:buNone/>
-            </a:pPr>
-            <a:endParaRPr lang="ru-RU" dirty="0"/>
-          </a:p>
-          <a:p>
-            <a:pPr marL="0" indent="0">
-              <a:buNone/>
-            </a:pPr>
-            <a:endParaRPr lang="ru-RU" dirty="0" smtClean="0"/>
-          </a:p>
-          <a:p>
-            <a:pPr marL="0" indent="0">
-              <a:buNone/>
-            </a:pPr>
-            <a:r>
-              <a:rPr lang="ru-RU" b="1" dirty="0" smtClean="0"/>
-              <a:t>Цель – сбежать из ресторана любой ценой</a:t>
-            </a:r>
-            <a:r>
-              <a:rPr lang="ru-RU" dirty="0" smtClean="0"/>
-              <a:t>. Обслужить клиентов и пройти по всем локациям, чтобы собрать свой новый рецепт или же найти другой способ сбежать</a:t>
-            </a:r>
-          </a:p>
-        </p:txBody>
-      </p:sp>
       <p:pic>
         <p:nvPicPr>
-          <p:cNvPr id="2054" name="Picture 6" descr="Фото черной пустой тарелки сверху без фона | Премиум AI-сгенерированный PSD"/>
+          <p:cNvPr id="5" name="Picture 6" descr="Фото черной пустой тарелки сверху без фона | Премиум AI-сгенерированный PSD"/>
           <p:cNvPicPr>
             <a:picLocks noChangeAspect="1" noChangeArrowheads="1"/>
           </p:cNvPicPr>
           <p:nvPr/>
         </p:nvPicPr>
         <p:blipFill>
-          <a:blip r:embed="rId3">
+          <a:blip r:embed="rId2">
             <a:extLst>
               <a:ext uri="{BEBA8EAE-BF5A-486C-A8C5-ECC9F3942E4B}">
                 <a14:imgProps xmlns:a14="http://schemas.microsoft.com/office/drawing/2010/main">
-                  <a14:imgLayer r:embed="rId4">
+                  <a14:imgLayer r:embed="rId3">
                     <a14:imgEffect>
                       <a14:backgroundRemoval t="10000" b="90000" l="10000" r="90000"/>
                     </a14:imgEffect>
@@ -7942,8 +7210,8 @@
         </p:blipFill>
         <p:spPr bwMode="auto">
           <a:xfrm>
-            <a:off x="7486022" y="3233135"/>
-            <a:ext cx="2723101" cy="2723101"/>
+            <a:off x="813917" y="3451610"/>
+            <a:ext cx="3486778" cy="3486778"/>
           </a:xfrm>
           <a:prstGeom prst="rect">
             <a:avLst/>
@@ -7970,131 +7238,29 @@
             <p:ph type="title"/>
           </p:nvPr>
         </p:nvSpPr>
-        <p:spPr>
-          <a:xfrm>
-            <a:off x="1251678" y="382385"/>
-            <a:ext cx="9490213" cy="1492132"/>
-          </a:xfrm>
-        </p:spPr>
-        <p:txBody>
-          <a:bodyPr/>
-          <a:lstStyle/>
-          <a:p>
-            <a:r>
-              <a:rPr lang="ru-RU" dirty="0" smtClean="0"/>
-              <a:t>завязка</a:t>
-            </a:r>
-            <a:endParaRPr lang="ru-RU" dirty="0"/>
-          </a:p>
-        </p:txBody>
-      </p:sp>
-      <p:pic>
-        <p:nvPicPr>
-          <p:cNvPr id="2050" name="Picture 2" descr="Пнг Разбитая тарелка 24 фото"/>
-          <p:cNvPicPr>
-            <a:picLocks noChangeAspect="1" noChangeArrowheads="1"/>
-          </p:cNvPicPr>
-          <p:nvPr/>
-        </p:nvPicPr>
-        <p:blipFill>
-          <a:blip r:embed="rId5">
-            <a:extLst>
-              <a:ext uri="{28A0092B-C50C-407E-A947-70E740481C1C}">
-                <a14:useLocalDpi xmlns:a14="http://schemas.microsoft.com/office/drawing/2010/main" val="0"/>
-              </a:ext>
-            </a:extLst>
-          </a:blip>
-          <a:srcRect/>
-          <a:stretch>
-            <a:fillRect/>
-          </a:stretch>
-        </p:blipFill>
-        <p:spPr bwMode="auto">
-          <a:xfrm>
-            <a:off x="8980763" y="2394696"/>
-            <a:ext cx="2989488" cy="2989489"/>
-          </a:xfrm>
-          <a:prstGeom prst="rect">
-            <a:avLst/>
-          </a:prstGeom>
-          <a:noFill/>
-          <a:extLst>
-            <a:ext uri="{909E8E84-426E-40DD-AFC4-6F175D3DCCD1}">
-              <a14:hiddenFill xmlns:a14="http://schemas.microsoft.com/office/drawing/2010/main">
-                <a:solidFill>
-                  <a:srgbClr val="FFFFFF"/>
-                </a:solidFill>
-              </a14:hiddenFill>
-            </a:ext>
-          </a:extLst>
-        </p:spPr>
-      </p:pic>
-    </p:spTree>
-    <p:extLst>
-      <p:ext uri="{BB962C8B-B14F-4D97-AF65-F5344CB8AC3E}">
-        <p14:creationId xmlns:p14="http://schemas.microsoft.com/office/powerpoint/2010/main" val="2317323613"/>
-      </p:ext>
-    </p:extLst>
-  </p:cSld>
-  <p:clrMapOvr>
-    <a:masterClrMapping/>
-  </p:clrMapOvr>
-  <p:timing>
-    <p:tnLst>
-      <p:par>
-        <p:cTn id="1" dur="indefinite" restart="never" nodeType="tmRoot"/>
-      </p:par>
-    </p:tnLst>
-  </p:timing>
-</p:sld>
-</file>
-
-<file path=ppt/slides/slide3.xml><?xml version="1.0" encoding="utf-8"?>
-<p:sld xmlns:a="http://schemas.openxmlformats.org/drawingml/2006/main" xmlns:r="http://schemas.openxmlformats.org/officeDocument/2006/relationships" xmlns:p="http://schemas.openxmlformats.org/presentationml/2006/main">
-  <p:cSld>
-    <p:spTree>
-      <p:nvGrpSpPr>
-        <p:cNvPr id="1" name=""/>
-        <p:cNvGrpSpPr/>
-        <p:nvPr/>
-      </p:nvGrpSpPr>
-      <p:grpSpPr>
-        <a:xfrm>
-          <a:off x="0" y="0"/>
-          <a:ext cx="0" cy="0"/>
-          <a:chOff x="0" y="0"/>
-          <a:chExt cx="0" cy="0"/>
-        </a:xfrm>
-      </p:grpSpPr>
-      <p:sp>
-        <p:nvSpPr>
-          <p:cNvPr id="2" name="Заголовок 1"/>
-          <p:cNvSpPr>
-            <a:spLocks noGrp="1"/>
-          </p:cNvSpPr>
-          <p:nvPr>
-            <p:ph type="title"/>
-          </p:nvPr>
-        </p:nvSpPr>
         <p:spPr/>
         <p:txBody>
           <a:bodyPr/>
           <a:lstStyle/>
           <a:p>
             <a:r>
+              <a:rPr lang="en-US" dirty="0"/>
+              <a:t>Plate of </a:t>
+            </a:r>
+            <a:r>
+              <a:rPr lang="en-US" dirty="0" smtClean="0"/>
+              <a:t>Fate</a:t>
+            </a:r>
+            <a:r>
               <a:rPr lang="ru-RU" dirty="0" smtClean="0"/>
-              <a:t>Геймплей </a:t>
+              <a:t/>
             </a:r>
             <a:br>
               <a:rPr lang="ru-RU" dirty="0" smtClean="0"/>
             </a:br>
             <a:r>
-              <a:rPr lang="ru-RU" dirty="0"/>
-              <a:t>	</a:t>
-            </a:r>
-            <a:r>
-              <a:rPr lang="ru-RU" dirty="0" smtClean="0"/>
-              <a:t>	и стилистика</a:t>
+              <a:rPr lang="ru-RU" sz="1400" dirty="0" smtClean="0"/>
+              <a:t>сбежать из общепита</a:t>
             </a:r>
             <a:endParaRPr lang="ru-RU" dirty="0"/>
           </a:p>
@@ -8112,271 +7278,8 @@
         </p:nvSpPr>
         <p:spPr>
           <a:xfrm>
-            <a:off x="1115367" y="2286001"/>
-            <a:ext cx="10314633" cy="4235379"/>
-          </a:xfrm>
-        </p:spPr>
-        <p:txBody>
-          <a:bodyPr>
-            <a:normAutofit lnSpcReduction="10000"/>
-          </a:bodyPr>
-          <a:lstStyle/>
-          <a:p>
-            <a:pPr marL="0" indent="0">
-              <a:buNone/>
-            </a:pPr>
-            <a:r>
-              <a:rPr lang="ru-RU" dirty="0"/>
-              <a:t>Визуально это </a:t>
-            </a:r>
-            <a:r>
-              <a:rPr lang="ru-RU" b="1" dirty="0"/>
-              <a:t>консоль с текстовым описанием </a:t>
-            </a:r>
-            <a:r>
-              <a:rPr lang="ru-RU" dirty="0"/>
-              <a:t>всего на локации. Никакой графики — только </a:t>
-            </a:r>
-            <a:r>
-              <a:rPr lang="ru-RU" dirty="0" smtClean="0"/>
-              <a:t>текст</a:t>
-            </a:r>
-          </a:p>
-          <a:p>
-            <a:pPr marL="0" indent="0">
-              <a:buNone/>
-            </a:pPr>
-            <a:endParaRPr lang="ru-RU" dirty="0" smtClean="0"/>
-          </a:p>
-          <a:p>
-            <a:pPr marL="0" indent="0">
-              <a:buNone/>
-            </a:pPr>
-            <a:r>
-              <a:rPr lang="ru-RU" dirty="0" smtClean="0"/>
-              <a:t>Мир состоит из </a:t>
-            </a:r>
-            <a:r>
-              <a:rPr lang="ru-RU" b="1" dirty="0" smtClean="0"/>
-              <a:t>трех этажей </a:t>
-            </a:r>
-            <a:r>
-              <a:rPr lang="ru-RU" dirty="0" smtClean="0"/>
-              <a:t>ресторана с разными типами клиентов на каждом:</a:t>
-            </a:r>
-          </a:p>
-          <a:p>
-            <a:pPr marL="0" indent="0">
-              <a:buNone/>
-            </a:pPr>
-            <a:r>
-              <a:rPr lang="ru-RU" b="1" dirty="0"/>
-              <a:t>1-й:</a:t>
-            </a:r>
-            <a:r>
-              <a:rPr lang="ru-RU" dirty="0"/>
-              <a:t> Офисные </a:t>
-            </a:r>
-            <a:r>
-              <a:rPr lang="ru-RU" dirty="0" smtClean="0"/>
-              <a:t>работники на бизнес ланчах. </a:t>
-            </a:r>
-            <a:r>
-              <a:rPr lang="ru-RU" dirty="0"/>
-              <a:t>Терпения </a:t>
-            </a:r>
-            <a:r>
-              <a:rPr lang="ru-RU" dirty="0" smtClean="0"/>
-              <a:t>мало, легкие заказы.</a:t>
-            </a:r>
-          </a:p>
-          <a:p>
-            <a:pPr marL="0" indent="0">
-              <a:buNone/>
-            </a:pPr>
-            <a:r>
-              <a:rPr lang="ru-RU" b="1" dirty="0" smtClean="0"/>
-              <a:t>2-й</a:t>
-            </a:r>
-            <a:r>
-              <a:rPr lang="ru-RU" b="1" dirty="0"/>
-              <a:t>:</a:t>
-            </a:r>
-            <a:r>
-              <a:rPr lang="ru-RU" dirty="0"/>
-              <a:t> Семьи и компании. Заказ на группу, терпение </a:t>
-            </a:r>
-            <a:r>
-              <a:rPr lang="ru-RU" dirty="0" smtClean="0"/>
-              <a:t>общее, но самое большое из всех.</a:t>
-            </a:r>
-            <a:endParaRPr lang="ru-RU" dirty="0"/>
-          </a:p>
-          <a:p>
-            <a:pPr marL="0" indent="0">
-              <a:buNone/>
-            </a:pPr>
-            <a:r>
-              <a:rPr lang="ru-RU" b="1" dirty="0"/>
-              <a:t>3-й: </a:t>
-            </a:r>
-            <a:r>
-              <a:rPr lang="ru-RU" dirty="0" smtClean="0"/>
-              <a:t>VIP зал, богатые клиенты. </a:t>
-            </a:r>
-            <a:r>
-              <a:rPr lang="ru-RU" dirty="0"/>
-              <a:t>Терпение </a:t>
-            </a:r>
-            <a:r>
-              <a:rPr lang="ru-RU" dirty="0" smtClean="0"/>
-              <a:t>наименьшее из всех, рецепты сложнее.</a:t>
-            </a:r>
-          </a:p>
-          <a:p>
-            <a:pPr marL="0" indent="0">
-              <a:buNone/>
-            </a:pPr>
-            <a:endParaRPr lang="ru-RU" dirty="0"/>
-          </a:p>
-          <a:p>
-            <a:pPr marL="0" indent="0">
-              <a:buNone/>
-            </a:pPr>
-            <a:r>
-              <a:rPr lang="ru-RU" b="1" dirty="0" smtClean="0"/>
-              <a:t>Игроку необходимо </a:t>
-            </a:r>
-            <a:r>
-              <a:rPr lang="ru-RU" dirty="0" smtClean="0"/>
-              <a:t>обслуживать клиентов, находить на локациях новые рецепты, помещать в ограниченный инвентарь ингредиенты с локаций и объединять их в блюда для гостей</a:t>
-            </a:r>
-            <a:endParaRPr lang="ru-RU" dirty="0"/>
-          </a:p>
-        </p:txBody>
-      </p:sp>
-      <p:pic>
-        <p:nvPicPr>
-          <p:cNvPr id="6" name="Рисунок 5"/>
-          <p:cNvPicPr>
-            <a:picLocks noChangeAspect="1"/>
-          </p:cNvPicPr>
-          <p:nvPr/>
-        </p:nvPicPr>
-        <p:blipFill>
-          <a:blip r:embed="rId3"/>
-          <a:stretch>
-            <a:fillRect/>
-          </a:stretch>
-        </p:blipFill>
-        <p:spPr>
-          <a:xfrm rot="18481990">
-            <a:off x="9084694" y="-372207"/>
-            <a:ext cx="2585358" cy="2585358"/>
-          </a:xfrm>
-          <a:prstGeom prst="rect">
-            <a:avLst/>
-          </a:prstGeom>
-        </p:spPr>
-      </p:pic>
-      <p:pic>
-        <p:nvPicPr>
-          <p:cNvPr id="8" name="Рисунок 7"/>
-          <p:cNvPicPr>
-            <a:picLocks noChangeAspect="1"/>
-          </p:cNvPicPr>
-          <p:nvPr/>
-        </p:nvPicPr>
-        <p:blipFill>
-          <a:blip r:embed="rId3"/>
-          <a:stretch>
-            <a:fillRect/>
-          </a:stretch>
-        </p:blipFill>
-        <p:spPr>
-          <a:xfrm rot="20038812">
-            <a:off x="9648090" y="221131"/>
-            <a:ext cx="2585358" cy="2585358"/>
-          </a:xfrm>
-          <a:prstGeom prst="rect">
-            <a:avLst/>
-          </a:prstGeom>
-        </p:spPr>
-      </p:pic>
-    </p:spTree>
-    <p:extLst>
-      <p:ext uri="{BB962C8B-B14F-4D97-AF65-F5344CB8AC3E}">
-        <p14:creationId xmlns:p14="http://schemas.microsoft.com/office/powerpoint/2010/main" val="3313818640"/>
-      </p:ext>
-    </p:extLst>
-  </p:cSld>
-  <p:clrMapOvr>
-    <a:masterClrMapping/>
-  </p:clrMapOvr>
-  <p:timing>
-    <p:tnLst>
-      <p:par>
-        <p:cTn id="1" dur="indefinite" restart="never" nodeType="tmRoot"/>
-      </p:par>
-    </p:tnLst>
-  </p:timing>
-</p:sld>
-</file>
-
-<file path=ppt/slides/slide4.xml><?xml version="1.0" encoding="utf-8"?>
-<p:sld xmlns:a="http://schemas.openxmlformats.org/drawingml/2006/main" xmlns:r="http://schemas.openxmlformats.org/officeDocument/2006/relationships" xmlns:p="http://schemas.openxmlformats.org/presentationml/2006/main">
-  <p:cSld>
-    <p:spTree>
-      <p:nvGrpSpPr>
-        <p:cNvPr id="1" name=""/>
-        <p:cNvGrpSpPr/>
-        <p:nvPr/>
-      </p:nvGrpSpPr>
-      <p:grpSpPr>
-        <a:xfrm>
-          <a:off x="0" y="0"/>
-          <a:ext cx="0" cy="0"/>
-          <a:chOff x="0" y="0"/>
-          <a:chExt cx="0" cy="0"/>
-        </a:xfrm>
-      </p:grpSpPr>
-      <p:sp>
-        <p:nvSpPr>
-          <p:cNvPr id="2" name="Заголовок 1"/>
-          <p:cNvSpPr>
-            <a:spLocks noGrp="1"/>
-          </p:cNvSpPr>
-          <p:nvPr>
-            <p:ph type="title"/>
-          </p:nvPr>
-        </p:nvSpPr>
-        <p:spPr/>
-        <p:txBody>
-          <a:bodyPr/>
-          <a:lstStyle/>
-          <a:p>
-            <a:r>
-              <a:rPr lang="ru-RU" dirty="0" smtClean="0"/>
-              <a:t>Основные механики</a:t>
-            </a:r>
-            <a:endParaRPr lang="ru-RU" dirty="0"/>
-          </a:p>
-        </p:txBody>
-      </p:sp>
-      <p:sp>
-        <p:nvSpPr>
-          <p:cNvPr id="3" name="Объект 2"/>
-          <p:cNvSpPr>
-            <a:spLocks noGrp="1"/>
-          </p:cNvSpPr>
-          <p:nvPr>
-            <p:ph idx="1"/>
-          </p:nvPr>
-        </p:nvSpPr>
-        <p:spPr>
-          <a:xfrm>
-            <a:off x="4205235" y="2728201"/>
-            <a:ext cx="7224765" cy="3547068"/>
+            <a:off x="1065275" y="1834040"/>
+            <a:ext cx="3235420" cy="590496"/>
           </a:xfrm>
         </p:spPr>
         <p:txBody>
@@ -8390,64 +7293,22 @@
             </a:pPr>
             <a:r>
               <a:rPr lang="ru-RU" b="1" dirty="0" smtClean="0"/>
-              <a:t>Инвентарь </a:t>
+              <a:t>Игрок – повар в ресторане</a:t>
             </a:r>
-            <a:r>
-              <a:rPr lang="ru-RU" b="1" dirty="0"/>
-              <a:t>ограничен до 5-ти слотов</a:t>
-            </a:r>
-            <a:r>
-              <a:rPr lang="ru-RU" dirty="0"/>
-              <a:t>. Игроку нужно думать, какие ингредиенты брать со склада, чтобы приготовить </a:t>
-            </a:r>
-            <a:r>
-              <a:rPr lang="ru-RU" dirty="0" smtClean="0"/>
-              <a:t>блюдо</a:t>
-            </a:r>
-          </a:p>
-          <a:p>
-            <a:pPr marL="0" indent="0">
-              <a:buNone/>
-            </a:pPr>
-            <a:endParaRPr lang="ru-RU" dirty="0" smtClean="0"/>
-          </a:p>
-          <a:p>
-            <a:pPr marL="0" indent="0">
-              <a:buNone/>
-            </a:pPr>
-            <a:r>
-              <a:rPr lang="ru-RU" b="1" dirty="0" smtClean="0"/>
-              <a:t>Система прокачки. </a:t>
-            </a:r>
-            <a:r>
-              <a:rPr lang="ru-RU" dirty="0" smtClean="0"/>
-              <a:t>За </a:t>
-            </a:r>
-            <a:r>
-              <a:rPr lang="ru-RU" dirty="0"/>
-              <a:t>успешные заказы игрок получает </a:t>
-            </a:r>
-            <a:r>
-              <a:rPr lang="ru-RU" dirty="0" smtClean="0"/>
-              <a:t>очки прокачки</a:t>
-            </a:r>
-            <a:endParaRPr lang="ru-RU" dirty="0"/>
-          </a:p>
-          <a:p>
-            <a:endParaRPr lang="ru-RU" dirty="0"/>
+            <a:endParaRPr lang="ru-RU" b="1" dirty="0"/>
           </a:p>
         </p:txBody>
       </p:sp>
       <p:pic>
         <p:nvPicPr>
-          <p:cNvPr id="4100" name="Picture 4" descr="Пнг Меню 28 фото"/>
+          <p:cNvPr id="4" name="Picture 2" descr="Пнг Разбитая тарелка 24 фото"/>
           <p:cNvPicPr>
             <a:picLocks noChangeAspect="1" noChangeArrowheads="1"/>
           </p:cNvPicPr>
           <p:nvPr/>
         </p:nvPicPr>
         <p:blipFill>
-          <a:blip r:embed="rId3" cstate="print">
+          <a:blip r:embed="rId4">
             <a:extLst>
               <a:ext uri="{28A0092B-C50C-407E-A947-70E740481C1C}">
                 <a14:useLocalDpi xmlns:a14="http://schemas.microsoft.com/office/drawing/2010/main" val="0"/>
@@ -8461,8 +7322,8 @@
         </p:blipFill>
         <p:spPr bwMode="auto">
           <a:xfrm>
-            <a:off x="726322" y="2499600"/>
-            <a:ext cx="4004269" cy="4004270"/>
+            <a:off x="8765309" y="-137161"/>
+            <a:ext cx="3096969" cy="3096970"/>
           </a:xfrm>
           <a:prstGeom prst="rect">
             <a:avLst/>
@@ -8481,27 +7342,27 @@
       </p:pic>
       <p:sp>
         <p:nvSpPr>
-          <p:cNvPr id="4" name="TextBox 3"/>
-          <p:cNvSpPr txBox="1"/>
+          <p:cNvPr id="6" name="Объект 2"/>
+          <p:cNvSpPr txBox="1">
+            <a:spLocks/>
+          </p:cNvSpPr>
           <p:nvPr/>
         </p:nvSpPr>
         <p:spPr>
           <a:xfrm>
-            <a:off x="1251678" y="1236069"/>
-            <a:ext cx="10313974" cy="1723549"/>
+            <a:off x="9898483" y="2722728"/>
+            <a:ext cx="1963795" cy="557683"/>
           </a:xfrm>
           <a:prstGeom prst="rect">
             <a:avLst/>
           </a:prstGeom>
-          <a:noFill/>
         </p:spPr>
         <p:txBody>
-          <a:bodyPr wrap="square" rtlCol="0">
-            <a:spAutoFit/>
+          <a:bodyPr vert="horz" lIns="91440" tIns="45720" rIns="91440" bIns="45720" rtlCol="0">
+            <a:normAutofit/>
           </a:bodyPr>
-          <a:lstStyle/>
-          <a:p>
-            <a:pPr lvl="0">
+          <a:lstStyle>
+            <a:lvl1pPr marL="228600" indent="-228600" algn="l" defTabSz="914400" rtl="0" eaLnBrk="1" latinLnBrk="0" hangingPunct="1">
               <a:lnSpc>
                 <a:spcPct val="110000"/>
               </a:lnSpc>
@@ -8509,115 +7370,812 @@
                 <a:spcPts val="700"/>
               </a:spcBef>
               <a:buClr>
-                <a:srgbClr val="323232"/>
+                <a:schemeClr val="tx2"/>
               </a:buClr>
+              <a:buFont typeface="Arial" panose="020B0604020202020204" pitchFamily="34" charset="0"/>
+              <a:buChar char="•"/>
+              <a:defRPr sz="2000" kern="1200">
+                <a:solidFill>
+                  <a:schemeClr val="tx1">
+                    <a:lumMod val="65000"/>
+                    <a:lumOff val="35000"/>
+                  </a:schemeClr>
+                </a:solidFill>
+                <a:latin typeface="+mn-lt"/>
+                <a:ea typeface="+mn-ea"/>
+                <a:cs typeface="+mn-cs"/>
+              </a:defRPr>
+            </a:lvl1pPr>
+            <a:lvl2pPr marL="685800" indent="-228600" algn="l" defTabSz="914400" rtl="0" eaLnBrk="1" latinLnBrk="0" hangingPunct="1">
+              <a:lnSpc>
+                <a:spcPct val="110000"/>
+              </a:lnSpc>
+              <a:spcBef>
+                <a:spcPts val="700"/>
+              </a:spcBef>
+              <a:buClr>
+                <a:schemeClr val="tx2"/>
+              </a:buClr>
+              <a:buFont typeface="Gill Sans MT" panose="020B0502020104020203" pitchFamily="34" charset="0"/>
+              <a:buChar char="–"/>
+              <a:defRPr sz="1800" kern="1200">
+                <a:solidFill>
+                  <a:schemeClr val="tx1">
+                    <a:lumMod val="65000"/>
+                    <a:lumOff val="35000"/>
+                  </a:schemeClr>
+                </a:solidFill>
+                <a:latin typeface="+mn-lt"/>
+                <a:ea typeface="+mn-ea"/>
+                <a:cs typeface="+mn-cs"/>
+              </a:defRPr>
+            </a:lvl2pPr>
+            <a:lvl3pPr marL="1143000" indent="-228600" algn="l" defTabSz="914400" rtl="0" eaLnBrk="1" latinLnBrk="0" hangingPunct="1">
+              <a:lnSpc>
+                <a:spcPct val="110000"/>
+              </a:lnSpc>
+              <a:spcBef>
+                <a:spcPts val="700"/>
+              </a:spcBef>
+              <a:buClr>
+                <a:schemeClr val="tx2"/>
+              </a:buClr>
+              <a:buFont typeface="Arial" panose="020B0604020202020204" pitchFamily="34" charset="0"/>
+              <a:buChar char="•"/>
+              <a:defRPr sz="1600" kern="1200">
+                <a:solidFill>
+                  <a:schemeClr val="tx1">
+                    <a:lumMod val="65000"/>
+                    <a:lumOff val="35000"/>
+                  </a:schemeClr>
+                </a:solidFill>
+                <a:latin typeface="+mn-lt"/>
+                <a:ea typeface="+mn-ea"/>
+                <a:cs typeface="+mn-cs"/>
+              </a:defRPr>
+            </a:lvl3pPr>
+            <a:lvl4pPr marL="1600200" indent="-228600" algn="l" defTabSz="914400" rtl="0" eaLnBrk="1" latinLnBrk="0" hangingPunct="1">
+              <a:lnSpc>
+                <a:spcPct val="110000"/>
+              </a:lnSpc>
+              <a:spcBef>
+                <a:spcPts val="700"/>
+              </a:spcBef>
+              <a:buClr>
+                <a:schemeClr val="tx2"/>
+              </a:buClr>
+              <a:buFont typeface="Gill Sans MT" panose="020B0502020104020203" pitchFamily="34" charset="0"/>
+              <a:buChar char="–"/>
+              <a:defRPr sz="1400" kern="1200">
+                <a:solidFill>
+                  <a:schemeClr val="tx1">
+                    <a:lumMod val="65000"/>
+                    <a:lumOff val="35000"/>
+                  </a:schemeClr>
+                </a:solidFill>
+                <a:latin typeface="+mn-lt"/>
+                <a:ea typeface="+mn-ea"/>
+                <a:cs typeface="+mn-cs"/>
+              </a:defRPr>
+            </a:lvl4pPr>
+            <a:lvl5pPr marL="2057400" indent="-228600" algn="l" defTabSz="914400" rtl="0" eaLnBrk="1" latinLnBrk="0" hangingPunct="1">
+              <a:lnSpc>
+                <a:spcPct val="110000"/>
+              </a:lnSpc>
+              <a:spcBef>
+                <a:spcPts val="700"/>
+              </a:spcBef>
+              <a:buClr>
+                <a:schemeClr val="tx2"/>
+              </a:buClr>
+              <a:buFont typeface="Arial" panose="020B0604020202020204" pitchFamily="34" charset="0"/>
+              <a:buChar char="•"/>
+              <a:defRPr sz="1400" kern="1200">
+                <a:solidFill>
+                  <a:schemeClr val="tx1">
+                    <a:lumMod val="65000"/>
+                    <a:lumOff val="35000"/>
+                  </a:schemeClr>
+                </a:solidFill>
+                <a:latin typeface="+mn-lt"/>
+                <a:ea typeface="+mn-ea"/>
+                <a:cs typeface="+mn-cs"/>
+              </a:defRPr>
+            </a:lvl5pPr>
+            <a:lvl6pPr marL="2514600" indent="-228600" algn="l" defTabSz="914400" rtl="0" eaLnBrk="1" latinLnBrk="0" hangingPunct="1">
+              <a:lnSpc>
+                <a:spcPct val="110000"/>
+              </a:lnSpc>
+              <a:spcBef>
+                <a:spcPts val="700"/>
+              </a:spcBef>
+              <a:buClr>
+                <a:schemeClr val="tx2"/>
+              </a:buClr>
+              <a:buFont typeface="Gill Sans MT" panose="020B0502020104020203" pitchFamily="34" charset="0"/>
+              <a:buChar char="–"/>
+              <a:defRPr sz="1400" kern="1200">
+                <a:solidFill>
+                  <a:schemeClr val="tx1">
+                    <a:lumMod val="65000"/>
+                    <a:lumOff val="35000"/>
+                  </a:schemeClr>
+                </a:solidFill>
+                <a:latin typeface="+mn-lt"/>
+                <a:ea typeface="+mn-ea"/>
+                <a:cs typeface="+mn-cs"/>
+              </a:defRPr>
+            </a:lvl6pPr>
+            <a:lvl7pPr marL="2971800" indent="-228600" algn="l" defTabSz="914400" rtl="0" eaLnBrk="1" latinLnBrk="0" hangingPunct="1">
+              <a:lnSpc>
+                <a:spcPct val="110000"/>
+              </a:lnSpc>
+              <a:spcBef>
+                <a:spcPts val="700"/>
+              </a:spcBef>
+              <a:buClr>
+                <a:schemeClr val="tx2"/>
+              </a:buClr>
+              <a:buFont typeface="Arial" panose="020B0604020202020204" pitchFamily="34" charset="0"/>
+              <a:buChar char="•"/>
+              <a:defRPr sz="1400" kern="1200">
+                <a:solidFill>
+                  <a:schemeClr val="tx1">
+                    <a:lumMod val="65000"/>
+                    <a:lumOff val="35000"/>
+                  </a:schemeClr>
+                </a:solidFill>
+                <a:latin typeface="+mn-lt"/>
+                <a:ea typeface="+mn-ea"/>
+                <a:cs typeface="+mn-cs"/>
+              </a:defRPr>
+            </a:lvl7pPr>
+            <a:lvl8pPr marL="3429000" indent="-228600" algn="l" defTabSz="914400" rtl="0" eaLnBrk="1" latinLnBrk="0" hangingPunct="1">
+              <a:lnSpc>
+                <a:spcPct val="110000"/>
+              </a:lnSpc>
+              <a:spcBef>
+                <a:spcPts val="700"/>
+              </a:spcBef>
+              <a:buClr>
+                <a:schemeClr val="tx2"/>
+              </a:buClr>
+              <a:buFont typeface="Gill Sans MT" panose="020B0502020104020203" pitchFamily="34" charset="0"/>
+              <a:buChar char="–"/>
+              <a:defRPr sz="1400" kern="1200" baseline="0">
+                <a:solidFill>
+                  <a:schemeClr val="tx1">
+                    <a:lumMod val="65000"/>
+                    <a:lumOff val="35000"/>
+                  </a:schemeClr>
+                </a:solidFill>
+                <a:latin typeface="+mn-lt"/>
+                <a:ea typeface="+mn-ea"/>
+                <a:cs typeface="+mn-cs"/>
+              </a:defRPr>
+            </a:lvl8pPr>
+            <a:lvl9pPr marL="3886200" indent="-228600" algn="l" defTabSz="914400" rtl="0" eaLnBrk="1" latinLnBrk="0" hangingPunct="1">
+              <a:lnSpc>
+                <a:spcPct val="110000"/>
+              </a:lnSpc>
+              <a:spcBef>
+                <a:spcPts val="700"/>
+              </a:spcBef>
+              <a:buClr>
+                <a:schemeClr val="tx2"/>
+              </a:buClr>
+              <a:buFont typeface="Arial" panose="020B0604020202020204" pitchFamily="34" charset="0"/>
+              <a:buChar char="•"/>
+              <a:defRPr sz="1400" kern="1200" baseline="0">
+                <a:solidFill>
+                  <a:schemeClr val="tx1">
+                    <a:lumMod val="65000"/>
+                    <a:lumOff val="35000"/>
+                  </a:schemeClr>
+                </a:solidFill>
+                <a:latin typeface="+mn-lt"/>
+                <a:ea typeface="+mn-ea"/>
+                <a:cs typeface="+mn-cs"/>
+              </a:defRPr>
+            </a:lvl9pPr>
+          </a:lstStyle>
+          <a:p>
+            <a:pPr marL="0" indent="0">
+              <a:buFont typeface="Arial" panose="020B0604020202020204" pitchFamily="34" charset="0"/>
+              <a:buNone/>
             </a:pPr>
             <a:r>
-              <a:rPr lang="ru-RU" sz="2000" b="1" dirty="0">
-                <a:solidFill>
-                  <a:prstClr val="black">
-                    <a:lumMod val="65000"/>
-                    <a:lumOff val="35000"/>
-                  </a:prstClr>
-                </a:solidFill>
-              </a:rPr>
-              <a:t>Подбор идеального блюда</a:t>
+              <a:rPr lang="ru-RU" b="1" dirty="0" smtClean="0"/>
+              <a:t>Текстовое </a:t>
             </a:r>
             <a:r>
-              <a:rPr lang="ru-RU" sz="2000" dirty="0">
-                <a:solidFill>
-                  <a:prstClr val="black">
-                    <a:lumMod val="65000"/>
-                    <a:lumOff val="35000"/>
-                  </a:prstClr>
-                </a:solidFill>
-              </a:rPr>
-              <a:t>. Гость описывает, чего хочет, а игрок выбирает рецепт из всех ему доступных. Если ошибся, то гость теряет одно значение терпения и </a:t>
+              <a:rPr lang="en-US" b="1" dirty="0" smtClean="0"/>
+              <a:t>RPG </a:t>
             </a:r>
             <a:r>
-              <a:rPr lang="ru-RU" sz="2000" dirty="0" smtClean="0">
-                <a:solidFill>
-                  <a:prstClr val="black">
-                    <a:lumMod val="65000"/>
-                    <a:lumOff val="35000"/>
-                  </a:prstClr>
-                </a:solidFill>
-              </a:rPr>
-              <a:t>у</a:t>
+              <a:rPr lang="ru-RU" b="1" dirty="0" smtClean="0"/>
+              <a:t> </a:t>
             </a:r>
-            <a:r>
-              <a:rPr lang="ru-RU" sz="2000" dirty="0" smtClean="0">
-                <a:solidFill>
-                  <a:prstClr val="black">
-                    <a:lumMod val="65000"/>
-                    <a:lumOff val="35000"/>
-                  </a:prstClr>
-                </a:solidFill>
-              </a:rPr>
-              <a:t>ходит когда терпение кончается</a:t>
-            </a:r>
-            <a:r>
-              <a:rPr lang="ru-RU" sz="2000" dirty="0" smtClean="0">
-                <a:solidFill>
-                  <a:prstClr val="black">
-                    <a:lumMod val="65000"/>
-                    <a:lumOff val="35000"/>
-                  </a:prstClr>
-                </a:solidFill>
-              </a:rPr>
-              <a:t>, </a:t>
-            </a:r>
-            <a:r>
-              <a:rPr lang="ru-RU" sz="2000" dirty="0">
-                <a:solidFill>
-                  <a:prstClr val="black">
-                    <a:lumMod val="65000"/>
-                    <a:lumOff val="35000"/>
-                  </a:prstClr>
-                </a:solidFill>
-              </a:rPr>
-              <a:t>приближая </a:t>
-            </a:r>
-            <a:r>
-              <a:rPr lang="ru-RU" sz="2000" dirty="0" smtClean="0">
-                <a:solidFill>
-                  <a:prstClr val="black">
-                    <a:lumMod val="65000"/>
-                    <a:lumOff val="35000"/>
-                  </a:prstClr>
-                </a:solidFill>
-              </a:rPr>
-              <a:t>проигрыш. </a:t>
-            </a:r>
-            <a:r>
-              <a:rPr lang="ru-RU" sz="2000" dirty="0">
-                <a:solidFill>
-                  <a:prstClr val="black">
-                    <a:lumMod val="65000"/>
-                    <a:lumOff val="35000"/>
-                  </a:prstClr>
-                </a:solidFill>
-              </a:rPr>
-              <a:t>Если выбор верный, то игрок получает 1 очко прокачки</a:t>
-            </a:r>
-          </a:p>
-          <a:p>
-            <a:endParaRPr lang="ru-RU" dirty="0"/>
+            <a:endParaRPr lang="ru-RU" b="1" dirty="0"/>
           </a:p>
         </p:txBody>
       </p:sp>
       <p:sp>
         <p:nvSpPr>
-          <p:cNvPr id="6" name="AutoShape 10" descr="Фарфоровая тарелка Посуда Чаша Стеклянная, Тарелка, стекло, тарелка png |  PNGEgg"/>
-          <p:cNvSpPr>
-            <a:spLocks noChangeAspect="1" noChangeArrowheads="1"/>
+          <p:cNvPr id="8" name="Объект 2"/>
+          <p:cNvSpPr txBox="1">
+            <a:spLocks/>
           </p:cNvSpPr>
           <p:nvPr/>
         </p:nvSpPr>
+        <p:spPr>
+          <a:xfrm>
+            <a:off x="1577592" y="2288759"/>
+            <a:ext cx="3305908" cy="908130"/>
+          </a:xfrm>
+          <a:prstGeom prst="rect">
+            <a:avLst/>
+          </a:prstGeom>
+        </p:spPr>
+        <p:txBody>
+          <a:bodyPr vert="horz" lIns="91440" tIns="45720" rIns="91440" bIns="45720" rtlCol="0">
+            <a:normAutofit/>
+          </a:bodyPr>
+          <a:lstStyle>
+            <a:lvl1pPr marL="228600" indent="-228600" algn="l" defTabSz="914400" rtl="0" eaLnBrk="1" latinLnBrk="0" hangingPunct="1">
+              <a:lnSpc>
+                <a:spcPct val="110000"/>
+              </a:lnSpc>
+              <a:spcBef>
+                <a:spcPts val="700"/>
+              </a:spcBef>
+              <a:buClr>
+                <a:schemeClr val="tx2"/>
+              </a:buClr>
+              <a:buFont typeface="Arial" panose="020B0604020202020204" pitchFamily="34" charset="0"/>
+              <a:buChar char="•"/>
+              <a:defRPr sz="2000" kern="1200">
+                <a:solidFill>
+                  <a:schemeClr val="tx1">
+                    <a:lumMod val="65000"/>
+                    <a:lumOff val="35000"/>
+                  </a:schemeClr>
+                </a:solidFill>
+                <a:latin typeface="+mn-lt"/>
+                <a:ea typeface="+mn-ea"/>
+                <a:cs typeface="+mn-cs"/>
+              </a:defRPr>
+            </a:lvl1pPr>
+            <a:lvl2pPr marL="685800" indent="-228600" algn="l" defTabSz="914400" rtl="0" eaLnBrk="1" latinLnBrk="0" hangingPunct="1">
+              <a:lnSpc>
+                <a:spcPct val="110000"/>
+              </a:lnSpc>
+              <a:spcBef>
+                <a:spcPts val="700"/>
+              </a:spcBef>
+              <a:buClr>
+                <a:schemeClr val="tx2"/>
+              </a:buClr>
+              <a:buFont typeface="Gill Sans MT" panose="020B0502020104020203" pitchFamily="34" charset="0"/>
+              <a:buChar char="–"/>
+              <a:defRPr sz="1800" kern="1200">
+                <a:solidFill>
+                  <a:schemeClr val="tx1">
+                    <a:lumMod val="65000"/>
+                    <a:lumOff val="35000"/>
+                  </a:schemeClr>
+                </a:solidFill>
+                <a:latin typeface="+mn-lt"/>
+                <a:ea typeface="+mn-ea"/>
+                <a:cs typeface="+mn-cs"/>
+              </a:defRPr>
+            </a:lvl2pPr>
+            <a:lvl3pPr marL="1143000" indent="-228600" algn="l" defTabSz="914400" rtl="0" eaLnBrk="1" latinLnBrk="0" hangingPunct="1">
+              <a:lnSpc>
+                <a:spcPct val="110000"/>
+              </a:lnSpc>
+              <a:spcBef>
+                <a:spcPts val="700"/>
+              </a:spcBef>
+              <a:buClr>
+                <a:schemeClr val="tx2"/>
+              </a:buClr>
+              <a:buFont typeface="Arial" panose="020B0604020202020204" pitchFamily="34" charset="0"/>
+              <a:buChar char="•"/>
+              <a:defRPr sz="1600" kern="1200">
+                <a:solidFill>
+                  <a:schemeClr val="tx1">
+                    <a:lumMod val="65000"/>
+                    <a:lumOff val="35000"/>
+                  </a:schemeClr>
+                </a:solidFill>
+                <a:latin typeface="+mn-lt"/>
+                <a:ea typeface="+mn-ea"/>
+                <a:cs typeface="+mn-cs"/>
+              </a:defRPr>
+            </a:lvl3pPr>
+            <a:lvl4pPr marL="1600200" indent="-228600" algn="l" defTabSz="914400" rtl="0" eaLnBrk="1" latinLnBrk="0" hangingPunct="1">
+              <a:lnSpc>
+                <a:spcPct val="110000"/>
+              </a:lnSpc>
+              <a:spcBef>
+                <a:spcPts val="700"/>
+              </a:spcBef>
+              <a:buClr>
+                <a:schemeClr val="tx2"/>
+              </a:buClr>
+              <a:buFont typeface="Gill Sans MT" panose="020B0502020104020203" pitchFamily="34" charset="0"/>
+              <a:buChar char="–"/>
+              <a:defRPr sz="1400" kern="1200">
+                <a:solidFill>
+                  <a:schemeClr val="tx1">
+                    <a:lumMod val="65000"/>
+                    <a:lumOff val="35000"/>
+                  </a:schemeClr>
+                </a:solidFill>
+                <a:latin typeface="+mn-lt"/>
+                <a:ea typeface="+mn-ea"/>
+                <a:cs typeface="+mn-cs"/>
+              </a:defRPr>
+            </a:lvl4pPr>
+            <a:lvl5pPr marL="2057400" indent="-228600" algn="l" defTabSz="914400" rtl="0" eaLnBrk="1" latinLnBrk="0" hangingPunct="1">
+              <a:lnSpc>
+                <a:spcPct val="110000"/>
+              </a:lnSpc>
+              <a:spcBef>
+                <a:spcPts val="700"/>
+              </a:spcBef>
+              <a:buClr>
+                <a:schemeClr val="tx2"/>
+              </a:buClr>
+              <a:buFont typeface="Arial" panose="020B0604020202020204" pitchFamily="34" charset="0"/>
+              <a:buChar char="•"/>
+              <a:defRPr sz="1400" kern="1200">
+                <a:solidFill>
+                  <a:schemeClr val="tx1">
+                    <a:lumMod val="65000"/>
+                    <a:lumOff val="35000"/>
+                  </a:schemeClr>
+                </a:solidFill>
+                <a:latin typeface="+mn-lt"/>
+                <a:ea typeface="+mn-ea"/>
+                <a:cs typeface="+mn-cs"/>
+              </a:defRPr>
+            </a:lvl5pPr>
+            <a:lvl6pPr marL="2514600" indent="-228600" algn="l" defTabSz="914400" rtl="0" eaLnBrk="1" latinLnBrk="0" hangingPunct="1">
+              <a:lnSpc>
+                <a:spcPct val="110000"/>
+              </a:lnSpc>
+              <a:spcBef>
+                <a:spcPts val="700"/>
+              </a:spcBef>
+              <a:buClr>
+                <a:schemeClr val="tx2"/>
+              </a:buClr>
+              <a:buFont typeface="Gill Sans MT" panose="020B0502020104020203" pitchFamily="34" charset="0"/>
+              <a:buChar char="–"/>
+              <a:defRPr sz="1400" kern="1200">
+                <a:solidFill>
+                  <a:schemeClr val="tx1">
+                    <a:lumMod val="65000"/>
+                    <a:lumOff val="35000"/>
+                  </a:schemeClr>
+                </a:solidFill>
+                <a:latin typeface="+mn-lt"/>
+                <a:ea typeface="+mn-ea"/>
+                <a:cs typeface="+mn-cs"/>
+              </a:defRPr>
+            </a:lvl6pPr>
+            <a:lvl7pPr marL="2971800" indent="-228600" algn="l" defTabSz="914400" rtl="0" eaLnBrk="1" latinLnBrk="0" hangingPunct="1">
+              <a:lnSpc>
+                <a:spcPct val="110000"/>
+              </a:lnSpc>
+              <a:spcBef>
+                <a:spcPts val="700"/>
+              </a:spcBef>
+              <a:buClr>
+                <a:schemeClr val="tx2"/>
+              </a:buClr>
+              <a:buFont typeface="Arial" panose="020B0604020202020204" pitchFamily="34" charset="0"/>
+              <a:buChar char="•"/>
+              <a:defRPr sz="1400" kern="1200">
+                <a:solidFill>
+                  <a:schemeClr val="tx1">
+                    <a:lumMod val="65000"/>
+                    <a:lumOff val="35000"/>
+                  </a:schemeClr>
+                </a:solidFill>
+                <a:latin typeface="+mn-lt"/>
+                <a:ea typeface="+mn-ea"/>
+                <a:cs typeface="+mn-cs"/>
+              </a:defRPr>
+            </a:lvl7pPr>
+            <a:lvl8pPr marL="3429000" indent="-228600" algn="l" defTabSz="914400" rtl="0" eaLnBrk="1" latinLnBrk="0" hangingPunct="1">
+              <a:lnSpc>
+                <a:spcPct val="110000"/>
+              </a:lnSpc>
+              <a:spcBef>
+                <a:spcPts val="700"/>
+              </a:spcBef>
+              <a:buClr>
+                <a:schemeClr val="tx2"/>
+              </a:buClr>
+              <a:buFont typeface="Gill Sans MT" panose="020B0502020104020203" pitchFamily="34" charset="0"/>
+              <a:buChar char="–"/>
+              <a:defRPr sz="1400" kern="1200" baseline="0">
+                <a:solidFill>
+                  <a:schemeClr val="tx1">
+                    <a:lumMod val="65000"/>
+                    <a:lumOff val="35000"/>
+                  </a:schemeClr>
+                </a:solidFill>
+                <a:latin typeface="+mn-lt"/>
+                <a:ea typeface="+mn-ea"/>
+                <a:cs typeface="+mn-cs"/>
+              </a:defRPr>
+            </a:lvl8pPr>
+            <a:lvl9pPr marL="3886200" indent="-228600" algn="l" defTabSz="914400" rtl="0" eaLnBrk="1" latinLnBrk="0" hangingPunct="1">
+              <a:lnSpc>
+                <a:spcPct val="110000"/>
+              </a:lnSpc>
+              <a:spcBef>
+                <a:spcPts val="700"/>
+              </a:spcBef>
+              <a:buClr>
+                <a:schemeClr val="tx2"/>
+              </a:buClr>
+              <a:buFont typeface="Arial" panose="020B0604020202020204" pitchFamily="34" charset="0"/>
+              <a:buChar char="•"/>
+              <a:defRPr sz="1400" kern="1200" baseline="0">
+                <a:solidFill>
+                  <a:schemeClr val="tx1">
+                    <a:lumMod val="65000"/>
+                    <a:lumOff val="35000"/>
+                  </a:schemeClr>
+                </a:solidFill>
+                <a:latin typeface="+mn-lt"/>
+                <a:ea typeface="+mn-ea"/>
+                <a:cs typeface="+mn-cs"/>
+              </a:defRPr>
+            </a:lvl9pPr>
+          </a:lstStyle>
+          <a:p>
+            <a:pPr marL="0" indent="0">
+              <a:buNone/>
+            </a:pPr>
+            <a:r>
+              <a:rPr lang="ru-RU" b="1" dirty="0"/>
+              <a:t>Цель – сбежать из ресторана любой ценой</a:t>
+            </a:r>
+          </a:p>
+        </p:txBody>
+      </p:sp>
+      <p:sp>
+        <p:nvSpPr>
+          <p:cNvPr id="9" name="Объект 2"/>
+          <p:cNvSpPr txBox="1">
+            <a:spLocks/>
+          </p:cNvSpPr>
+          <p:nvPr/>
+        </p:nvSpPr>
+        <p:spPr>
+          <a:xfrm>
+            <a:off x="4672481" y="2288759"/>
+            <a:ext cx="3437553" cy="3014971"/>
+          </a:xfrm>
+          <a:prstGeom prst="rect">
+            <a:avLst/>
+          </a:prstGeom>
+        </p:spPr>
+        <p:txBody>
+          <a:bodyPr vert="horz" lIns="91440" tIns="45720" rIns="91440" bIns="45720" rtlCol="0">
+            <a:normAutofit fontScale="92500" lnSpcReduction="20000"/>
+          </a:bodyPr>
+          <a:lstStyle>
+            <a:lvl1pPr marL="228600" indent="-228600" algn="l" defTabSz="914400" rtl="0" eaLnBrk="1" latinLnBrk="0" hangingPunct="1">
+              <a:lnSpc>
+                <a:spcPct val="110000"/>
+              </a:lnSpc>
+              <a:spcBef>
+                <a:spcPts val="700"/>
+              </a:spcBef>
+              <a:buClr>
+                <a:schemeClr val="tx2"/>
+              </a:buClr>
+              <a:buFont typeface="Arial" panose="020B0604020202020204" pitchFamily="34" charset="0"/>
+              <a:buChar char="•"/>
+              <a:defRPr sz="2000" kern="1200">
+                <a:solidFill>
+                  <a:schemeClr val="tx1">
+                    <a:lumMod val="65000"/>
+                    <a:lumOff val="35000"/>
+                  </a:schemeClr>
+                </a:solidFill>
+                <a:latin typeface="+mn-lt"/>
+                <a:ea typeface="+mn-ea"/>
+                <a:cs typeface="+mn-cs"/>
+              </a:defRPr>
+            </a:lvl1pPr>
+            <a:lvl2pPr marL="685800" indent="-228600" algn="l" defTabSz="914400" rtl="0" eaLnBrk="1" latinLnBrk="0" hangingPunct="1">
+              <a:lnSpc>
+                <a:spcPct val="110000"/>
+              </a:lnSpc>
+              <a:spcBef>
+                <a:spcPts val="700"/>
+              </a:spcBef>
+              <a:buClr>
+                <a:schemeClr val="tx2"/>
+              </a:buClr>
+              <a:buFont typeface="Gill Sans MT" panose="020B0502020104020203" pitchFamily="34" charset="0"/>
+              <a:buChar char="–"/>
+              <a:defRPr sz="1800" kern="1200">
+                <a:solidFill>
+                  <a:schemeClr val="tx1">
+                    <a:lumMod val="65000"/>
+                    <a:lumOff val="35000"/>
+                  </a:schemeClr>
+                </a:solidFill>
+                <a:latin typeface="+mn-lt"/>
+                <a:ea typeface="+mn-ea"/>
+                <a:cs typeface="+mn-cs"/>
+              </a:defRPr>
+            </a:lvl2pPr>
+            <a:lvl3pPr marL="1143000" indent="-228600" algn="l" defTabSz="914400" rtl="0" eaLnBrk="1" latinLnBrk="0" hangingPunct="1">
+              <a:lnSpc>
+                <a:spcPct val="110000"/>
+              </a:lnSpc>
+              <a:spcBef>
+                <a:spcPts val="700"/>
+              </a:spcBef>
+              <a:buClr>
+                <a:schemeClr val="tx2"/>
+              </a:buClr>
+              <a:buFont typeface="Arial" panose="020B0604020202020204" pitchFamily="34" charset="0"/>
+              <a:buChar char="•"/>
+              <a:defRPr sz="1600" kern="1200">
+                <a:solidFill>
+                  <a:schemeClr val="tx1">
+                    <a:lumMod val="65000"/>
+                    <a:lumOff val="35000"/>
+                  </a:schemeClr>
+                </a:solidFill>
+                <a:latin typeface="+mn-lt"/>
+                <a:ea typeface="+mn-ea"/>
+                <a:cs typeface="+mn-cs"/>
+              </a:defRPr>
+            </a:lvl3pPr>
+            <a:lvl4pPr marL="1600200" indent="-228600" algn="l" defTabSz="914400" rtl="0" eaLnBrk="1" latinLnBrk="0" hangingPunct="1">
+              <a:lnSpc>
+                <a:spcPct val="110000"/>
+              </a:lnSpc>
+              <a:spcBef>
+                <a:spcPts val="700"/>
+              </a:spcBef>
+              <a:buClr>
+                <a:schemeClr val="tx2"/>
+              </a:buClr>
+              <a:buFont typeface="Gill Sans MT" panose="020B0502020104020203" pitchFamily="34" charset="0"/>
+              <a:buChar char="–"/>
+              <a:defRPr sz="1400" kern="1200">
+                <a:solidFill>
+                  <a:schemeClr val="tx1">
+                    <a:lumMod val="65000"/>
+                    <a:lumOff val="35000"/>
+                  </a:schemeClr>
+                </a:solidFill>
+                <a:latin typeface="+mn-lt"/>
+                <a:ea typeface="+mn-ea"/>
+                <a:cs typeface="+mn-cs"/>
+              </a:defRPr>
+            </a:lvl4pPr>
+            <a:lvl5pPr marL="2057400" indent="-228600" algn="l" defTabSz="914400" rtl="0" eaLnBrk="1" latinLnBrk="0" hangingPunct="1">
+              <a:lnSpc>
+                <a:spcPct val="110000"/>
+              </a:lnSpc>
+              <a:spcBef>
+                <a:spcPts val="700"/>
+              </a:spcBef>
+              <a:buClr>
+                <a:schemeClr val="tx2"/>
+              </a:buClr>
+              <a:buFont typeface="Arial" panose="020B0604020202020204" pitchFamily="34" charset="0"/>
+              <a:buChar char="•"/>
+              <a:defRPr sz="1400" kern="1200">
+                <a:solidFill>
+                  <a:schemeClr val="tx1">
+                    <a:lumMod val="65000"/>
+                    <a:lumOff val="35000"/>
+                  </a:schemeClr>
+                </a:solidFill>
+                <a:latin typeface="+mn-lt"/>
+                <a:ea typeface="+mn-ea"/>
+                <a:cs typeface="+mn-cs"/>
+              </a:defRPr>
+            </a:lvl5pPr>
+            <a:lvl6pPr marL="2514600" indent="-228600" algn="l" defTabSz="914400" rtl="0" eaLnBrk="1" latinLnBrk="0" hangingPunct="1">
+              <a:lnSpc>
+                <a:spcPct val="110000"/>
+              </a:lnSpc>
+              <a:spcBef>
+                <a:spcPts val="700"/>
+              </a:spcBef>
+              <a:buClr>
+                <a:schemeClr val="tx2"/>
+              </a:buClr>
+              <a:buFont typeface="Gill Sans MT" panose="020B0502020104020203" pitchFamily="34" charset="0"/>
+              <a:buChar char="–"/>
+              <a:defRPr sz="1400" kern="1200">
+                <a:solidFill>
+                  <a:schemeClr val="tx1">
+                    <a:lumMod val="65000"/>
+                    <a:lumOff val="35000"/>
+                  </a:schemeClr>
+                </a:solidFill>
+                <a:latin typeface="+mn-lt"/>
+                <a:ea typeface="+mn-ea"/>
+                <a:cs typeface="+mn-cs"/>
+              </a:defRPr>
+            </a:lvl6pPr>
+            <a:lvl7pPr marL="2971800" indent="-228600" algn="l" defTabSz="914400" rtl="0" eaLnBrk="1" latinLnBrk="0" hangingPunct="1">
+              <a:lnSpc>
+                <a:spcPct val="110000"/>
+              </a:lnSpc>
+              <a:spcBef>
+                <a:spcPts val="700"/>
+              </a:spcBef>
+              <a:buClr>
+                <a:schemeClr val="tx2"/>
+              </a:buClr>
+              <a:buFont typeface="Arial" panose="020B0604020202020204" pitchFamily="34" charset="0"/>
+              <a:buChar char="•"/>
+              <a:defRPr sz="1400" kern="1200">
+                <a:solidFill>
+                  <a:schemeClr val="tx1">
+                    <a:lumMod val="65000"/>
+                    <a:lumOff val="35000"/>
+                  </a:schemeClr>
+                </a:solidFill>
+                <a:latin typeface="+mn-lt"/>
+                <a:ea typeface="+mn-ea"/>
+                <a:cs typeface="+mn-cs"/>
+              </a:defRPr>
+            </a:lvl7pPr>
+            <a:lvl8pPr marL="3429000" indent="-228600" algn="l" defTabSz="914400" rtl="0" eaLnBrk="1" latinLnBrk="0" hangingPunct="1">
+              <a:lnSpc>
+                <a:spcPct val="110000"/>
+              </a:lnSpc>
+              <a:spcBef>
+                <a:spcPts val="700"/>
+              </a:spcBef>
+              <a:buClr>
+                <a:schemeClr val="tx2"/>
+              </a:buClr>
+              <a:buFont typeface="Gill Sans MT" panose="020B0502020104020203" pitchFamily="34" charset="0"/>
+              <a:buChar char="–"/>
+              <a:defRPr sz="1400" kern="1200" baseline="0">
+                <a:solidFill>
+                  <a:schemeClr val="tx1">
+                    <a:lumMod val="65000"/>
+                    <a:lumOff val="35000"/>
+                  </a:schemeClr>
+                </a:solidFill>
+                <a:latin typeface="+mn-lt"/>
+                <a:ea typeface="+mn-ea"/>
+                <a:cs typeface="+mn-cs"/>
+              </a:defRPr>
+            </a:lvl8pPr>
+            <a:lvl9pPr marL="3886200" indent="-228600" algn="l" defTabSz="914400" rtl="0" eaLnBrk="1" latinLnBrk="0" hangingPunct="1">
+              <a:lnSpc>
+                <a:spcPct val="110000"/>
+              </a:lnSpc>
+              <a:spcBef>
+                <a:spcPts val="700"/>
+              </a:spcBef>
+              <a:buClr>
+                <a:schemeClr val="tx2"/>
+              </a:buClr>
+              <a:buFont typeface="Arial" panose="020B0604020202020204" pitchFamily="34" charset="0"/>
+              <a:buChar char="•"/>
+              <a:defRPr sz="1400" kern="1200" baseline="0">
+                <a:solidFill>
+                  <a:schemeClr val="tx1">
+                    <a:lumMod val="65000"/>
+                    <a:lumOff val="35000"/>
+                  </a:schemeClr>
+                </a:solidFill>
+                <a:latin typeface="+mn-lt"/>
+                <a:ea typeface="+mn-ea"/>
+                <a:cs typeface="+mn-cs"/>
+              </a:defRPr>
+            </a:lvl9pPr>
+          </a:lstStyle>
+          <a:p>
+            <a:pPr marL="0" indent="0">
+              <a:buNone/>
+            </a:pPr>
+            <a:r>
+              <a:rPr lang="ru-RU" b="1" dirty="0" smtClean="0"/>
+              <a:t>Игроку необходимо:</a:t>
+            </a:r>
+          </a:p>
+          <a:p>
+            <a:pPr>
+              <a:buFontTx/>
+              <a:buChar char="-"/>
+            </a:pPr>
+            <a:r>
+              <a:rPr lang="ru-RU" dirty="0" smtClean="0"/>
+              <a:t>обслуживать клиентов</a:t>
+            </a:r>
+          </a:p>
+          <a:p>
+            <a:pPr>
+              <a:buFontTx/>
+              <a:buChar char="-"/>
+            </a:pPr>
+            <a:r>
+              <a:rPr lang="ru-RU" dirty="0" smtClean="0"/>
+              <a:t>находить </a:t>
+            </a:r>
+            <a:r>
+              <a:rPr lang="ru-RU" dirty="0"/>
+              <a:t>на локациях новые </a:t>
+            </a:r>
+            <a:r>
+              <a:rPr lang="ru-RU" dirty="0" smtClean="0"/>
+              <a:t>рецепты</a:t>
+            </a:r>
+          </a:p>
+          <a:p>
+            <a:pPr>
+              <a:buFontTx/>
+              <a:buChar char="-"/>
+            </a:pPr>
+            <a:r>
+              <a:rPr lang="ru-RU" dirty="0" smtClean="0"/>
+              <a:t> </a:t>
+            </a:r>
+            <a:r>
+              <a:rPr lang="ru-RU" dirty="0"/>
+              <a:t>помещать в ограниченный инвентарь ингредиенты с локаций и объединять их в блюда для гостей</a:t>
+            </a:r>
+          </a:p>
+          <a:p>
+            <a:pPr marL="0" indent="0">
+              <a:buFont typeface="Arial" panose="020B0604020202020204" pitchFamily="34" charset="0"/>
+              <a:buNone/>
+            </a:pPr>
+            <a:r>
+              <a:rPr lang="ru-RU" b="1" dirty="0" smtClean="0"/>
+              <a:t> </a:t>
+            </a:r>
+            <a:endParaRPr lang="ru-RU" b="1" dirty="0"/>
+          </a:p>
+        </p:txBody>
+      </p:sp>
+      <p:pic>
+        <p:nvPicPr>
+          <p:cNvPr id="1026" name="Picture 2" descr="GitHub - yudinikita/bulls-and-cows-cpp: Консольная реализация игры &quot;Быки и  коровы&quot; на С++. Есть сохранение и загрузка, 3 варианта сложности: легкий,  средний, сложный, меню."/>
+          <p:cNvPicPr>
+            <a:picLocks noChangeAspect="1" noChangeArrowheads="1"/>
+          </p:cNvPicPr>
+          <p:nvPr/>
+        </p:nvPicPr>
+        <p:blipFill rotWithShape="1">
+          <a:blip r:embed="rId5">
+            <a:extLst>
+              <a:ext uri="{28A0092B-C50C-407E-A947-70E740481C1C}">
+                <a14:useLocalDpi xmlns:a14="http://schemas.microsoft.com/office/drawing/2010/main" val="0"/>
+              </a:ext>
+            </a:extLst>
+          </a:blip>
+          <a:srcRect l="22999" t="33317" r="32062" b="14998"/>
+          <a:stretch/>
+        </p:blipFill>
         <p:spPr bwMode="auto">
           <a:xfrm>
-            <a:off x="63500" y="-136525"/>
-            <a:ext cx="304800" cy="304800"/>
+            <a:off x="8430115" y="3196889"/>
+            <a:ext cx="3432163" cy="1793192"/>
           </a:xfrm>
           <a:prstGeom prst="rect">
             <a:avLst/>
@@ -8633,258 +8191,30 @@
             </a:ext>
           </a:extLst>
         </p:spPr>
-        <p:txBody>
-          <a:bodyPr vert="horz" wrap="square" lIns="91440" tIns="45720" rIns="91440" bIns="45720" numCol="1" anchor="t" anchorCtr="0" compatLnSpc="1">
-            <a:prstTxWarp prst="textNoShape">
-              <a:avLst/>
-            </a:prstTxWarp>
-          </a:bodyPr>
-          <a:lstStyle/>
-          <a:p>
-            <a:endParaRPr lang="ru-RU"/>
-          </a:p>
-        </p:txBody>
-      </p:sp>
-      <p:pic>
-        <p:nvPicPr>
-          <p:cNvPr id="9" name="Рисунок 8"/>
-          <p:cNvPicPr>
-            <a:picLocks noChangeAspect="1"/>
-          </p:cNvPicPr>
-          <p:nvPr/>
-        </p:nvPicPr>
-        <p:blipFill>
-          <a:blip r:embed="rId4">
-            <a:extLst>
-              <a:ext uri="{BEBA8EAE-BF5A-486C-A8C5-ECC9F3942E4B}">
-                <a14:imgProps xmlns:a14="http://schemas.microsoft.com/office/drawing/2010/main">
-                  <a14:imgLayer r:embed="rId5">
-                    <a14:imgEffect>
-                      <a14:backgroundRemoval t="10000" b="90000" l="10000" r="90000"/>
-                    </a14:imgEffect>
-                  </a14:imgLayer>
-                </a14:imgProps>
-              </a:ext>
-            </a:extLst>
-          </a:blip>
-          <a:stretch>
-            <a:fillRect/>
-          </a:stretch>
-        </p:blipFill>
-        <p:spPr>
-          <a:xfrm>
-            <a:off x="7595746" y="4230357"/>
-            <a:ext cx="5123105" cy="2784296"/>
-          </a:xfrm>
-          <a:prstGeom prst="rect">
-            <a:avLst/>
-          </a:prstGeom>
-        </p:spPr>
-      </p:pic>
-    </p:spTree>
-    <p:extLst>
-      <p:ext uri="{BB962C8B-B14F-4D97-AF65-F5344CB8AC3E}">
-        <p14:creationId xmlns:p14="http://schemas.microsoft.com/office/powerpoint/2010/main" val="1258880642"/>
-      </p:ext>
-    </p:extLst>
-  </p:cSld>
-  <p:clrMapOvr>
-    <a:masterClrMapping/>
-  </p:clrMapOvr>
-  <p:timing>
-    <p:tnLst>
-      <p:par>
-        <p:cTn id="1" dur="indefinite" restart="never" nodeType="tmRoot"/>
-      </p:par>
-    </p:tnLst>
-  </p:timing>
-</p:sld>
-</file>
-
-<file path=ppt/slides/slide5.xml><?xml version="1.0" encoding="utf-8"?>
-<p:sld xmlns:a="http://schemas.openxmlformats.org/drawingml/2006/main" xmlns:r="http://schemas.openxmlformats.org/officeDocument/2006/relationships" xmlns:p="http://schemas.openxmlformats.org/presentationml/2006/main">
-  <p:cSld>
-    <p:spTree>
-      <p:nvGrpSpPr>
-        <p:cNvPr id="1" name=""/>
-        <p:cNvGrpSpPr/>
-        <p:nvPr/>
-      </p:nvGrpSpPr>
-      <p:grpSpPr>
-        <a:xfrm>
-          <a:off x="0" y="0"/>
-          <a:ext cx="0" cy="0"/>
-          <a:chOff x="0" y="0"/>
-          <a:chExt cx="0" cy="0"/>
-        </a:xfrm>
-      </p:grpSpPr>
-      <p:sp>
-        <p:nvSpPr>
-          <p:cNvPr id="2" name="Заголовок 1"/>
-          <p:cNvSpPr>
-            <a:spLocks noGrp="1"/>
-          </p:cNvSpPr>
-          <p:nvPr>
-            <p:ph type="title"/>
-          </p:nvPr>
-        </p:nvSpPr>
-        <p:spPr/>
-        <p:txBody>
-          <a:bodyPr/>
-          <a:lstStyle/>
-          <a:p>
-            <a:r>
-              <a:rPr lang="ru-RU" dirty="0" smtClean="0"/>
-              <a:t>Концовки</a:t>
-            </a:r>
-            <a:endParaRPr lang="ru-RU" dirty="0"/>
-          </a:p>
-        </p:txBody>
-      </p:sp>
-      <p:sp>
-        <p:nvSpPr>
-          <p:cNvPr id="3" name="Объект 2"/>
-          <p:cNvSpPr>
-            <a:spLocks noGrp="1"/>
-          </p:cNvSpPr>
-          <p:nvPr>
-            <p:ph idx="1"/>
-          </p:nvPr>
-        </p:nvSpPr>
-        <p:spPr>
-          <a:xfrm>
-            <a:off x="1251678" y="1214461"/>
-            <a:ext cx="10252010" cy="3642826"/>
-          </a:xfrm>
-        </p:spPr>
-        <p:txBody>
-          <a:bodyPr>
-            <a:normAutofit/>
-          </a:bodyPr>
-          <a:lstStyle/>
-          <a:p>
-            <a:pPr marL="0" indent="0">
-              <a:buNone/>
-            </a:pPr>
-            <a:r>
-              <a:rPr lang="ru-RU" dirty="0"/>
-              <a:t>От действий игрока зависят три финала</a:t>
-            </a:r>
-            <a:r>
-              <a:rPr lang="ru-RU" dirty="0" smtClean="0"/>
-              <a:t>:</a:t>
-            </a:r>
-            <a:endParaRPr lang="ru-RU" dirty="0"/>
-          </a:p>
-          <a:p>
-            <a:r>
-              <a:rPr lang="ru-RU" b="1" dirty="0"/>
-              <a:t>«В стенах ресторана» </a:t>
-            </a:r>
-            <a:r>
-              <a:rPr lang="ru-RU" dirty="0"/>
-              <a:t>- если уходит слишком много гостей, то игра заканчивается </a:t>
-            </a:r>
-            <a:r>
-              <a:rPr lang="ru-RU" dirty="0" smtClean="0"/>
-              <a:t>поражением</a:t>
-            </a:r>
-            <a:endParaRPr lang="ru-RU" dirty="0"/>
-          </a:p>
-          <a:p>
-            <a:r>
-              <a:rPr lang="ru-RU" b="1" dirty="0" smtClean="0"/>
-              <a:t>«Честный </a:t>
-            </a:r>
-            <a:r>
-              <a:rPr lang="ru-RU" b="1" dirty="0"/>
-              <a:t>повар</a:t>
-            </a:r>
-            <a:r>
-              <a:rPr lang="ru-RU" b="1" dirty="0" smtClean="0"/>
-              <a:t>» -</a:t>
-            </a:r>
-            <a:r>
-              <a:rPr lang="ru-RU" dirty="0" smtClean="0"/>
-              <a:t> </a:t>
-            </a:r>
-            <a:r>
-              <a:rPr lang="ru-RU" dirty="0"/>
-              <a:t>и</a:t>
-            </a:r>
-            <a:r>
-              <a:rPr lang="ru-RU" dirty="0" smtClean="0"/>
-              <a:t>грок собрал по ходу прохождения сюжета новый рецепт и обслужил необходимый минимум клиентов</a:t>
-            </a:r>
-            <a:endParaRPr lang="ru-RU" dirty="0"/>
-          </a:p>
-          <a:p>
-            <a:r>
-              <a:rPr lang="ru-RU" b="1" dirty="0" smtClean="0"/>
-              <a:t>«Самостоятельное </a:t>
-            </a:r>
-            <a:r>
-              <a:rPr lang="ru-RU" b="1" dirty="0"/>
-              <a:t>решение</a:t>
-            </a:r>
-            <a:r>
-              <a:rPr lang="ru-RU" b="1" dirty="0" smtClean="0"/>
-              <a:t>» - </a:t>
-            </a:r>
-            <a:r>
-              <a:rPr lang="ru-RU" dirty="0" smtClean="0"/>
-              <a:t>игрок обслужил всех клиентов в заведении. Ярость, накопленная после рабочего дня заставила бросить в босса тарелку с новым блюдом для меню</a:t>
-            </a:r>
-            <a:endParaRPr lang="ru-RU" dirty="0"/>
-          </a:p>
-        </p:txBody>
-      </p:sp>
-      <p:pic>
-        <p:nvPicPr>
-          <p:cNvPr id="5" name="Рисунок 4"/>
-          <p:cNvPicPr>
-            <a:picLocks noChangeAspect="1"/>
-          </p:cNvPicPr>
-          <p:nvPr/>
-        </p:nvPicPr>
-        <p:blipFill>
-          <a:blip r:embed="rId2"/>
-          <a:stretch>
-            <a:fillRect/>
-          </a:stretch>
-        </p:blipFill>
-        <p:spPr>
-          <a:xfrm>
-            <a:off x="7419109" y="4300363"/>
-            <a:ext cx="4010891" cy="2410391"/>
-          </a:xfrm>
-          <a:prstGeom prst="rect">
-            <a:avLst/>
-          </a:prstGeom>
-        </p:spPr>
       </p:pic>
       <p:sp>
         <p:nvSpPr>
-          <p:cNvPr id="7" name="Прямоугольник 6"/>
-          <p:cNvSpPr/>
+          <p:cNvPr id="12" name="Объект 2"/>
+          <p:cNvSpPr txBox="1">
+            <a:spLocks/>
+          </p:cNvSpPr>
           <p:nvPr/>
         </p:nvSpPr>
         <p:spPr>
           <a:xfrm>
-            <a:off x="1251678" y="4300363"/>
-            <a:ext cx="5988158" cy="769441"/>
+            <a:off x="8424724" y="5166367"/>
+            <a:ext cx="3437554" cy="1395208"/>
           </a:xfrm>
           <a:prstGeom prst="rect">
             <a:avLst/>
           </a:prstGeom>
         </p:spPr>
         <p:txBody>
-          <a:bodyPr wrap="square">
-            <a:spAutoFit/>
+          <a:bodyPr vert="horz" lIns="91440" tIns="45720" rIns="91440" bIns="45720" rtlCol="0">
+            <a:normAutofit/>
           </a:bodyPr>
-          <a:lstStyle/>
-          <a:p>
-            <a:pPr marL="228600" lvl="0" indent="-228600">
+          <a:lstStyle>
+            <a:lvl1pPr marL="228600" indent="-228600" algn="l" defTabSz="914400" rtl="0" eaLnBrk="1" latinLnBrk="0" hangingPunct="1">
               <a:lnSpc>
                 <a:spcPct val="110000"/>
               </a:lnSpc>
@@ -8892,149 +8222,497 @@
                 <a:spcPts val="700"/>
               </a:spcBef>
               <a:buClr>
-                <a:srgbClr val="323232"/>
+                <a:schemeClr val="tx2"/>
               </a:buClr>
               <a:buFont typeface="Arial" panose="020B0604020202020204" pitchFamily="34" charset="0"/>
               <a:buChar char="•"/>
+              <a:defRPr sz="2000" kern="1200">
+                <a:solidFill>
+                  <a:schemeClr val="tx1">
+                    <a:lumMod val="65000"/>
+                    <a:lumOff val="35000"/>
+                  </a:schemeClr>
+                </a:solidFill>
+                <a:latin typeface="+mn-lt"/>
+                <a:ea typeface="+mn-ea"/>
+                <a:cs typeface="+mn-cs"/>
+              </a:defRPr>
+            </a:lvl1pPr>
+            <a:lvl2pPr marL="685800" indent="-228600" algn="l" defTabSz="914400" rtl="0" eaLnBrk="1" latinLnBrk="0" hangingPunct="1">
+              <a:lnSpc>
+                <a:spcPct val="110000"/>
+              </a:lnSpc>
+              <a:spcBef>
+                <a:spcPts val="700"/>
+              </a:spcBef>
+              <a:buClr>
+                <a:schemeClr val="tx2"/>
+              </a:buClr>
+              <a:buFont typeface="Gill Sans MT" panose="020B0502020104020203" pitchFamily="34" charset="0"/>
+              <a:buChar char="–"/>
+              <a:defRPr sz="1800" kern="1200">
+                <a:solidFill>
+                  <a:schemeClr val="tx1">
+                    <a:lumMod val="65000"/>
+                    <a:lumOff val="35000"/>
+                  </a:schemeClr>
+                </a:solidFill>
+                <a:latin typeface="+mn-lt"/>
+                <a:ea typeface="+mn-ea"/>
+                <a:cs typeface="+mn-cs"/>
+              </a:defRPr>
+            </a:lvl2pPr>
+            <a:lvl3pPr marL="1143000" indent="-228600" algn="l" defTabSz="914400" rtl="0" eaLnBrk="1" latinLnBrk="0" hangingPunct="1">
+              <a:lnSpc>
+                <a:spcPct val="110000"/>
+              </a:lnSpc>
+              <a:spcBef>
+                <a:spcPts val="700"/>
+              </a:spcBef>
+              <a:buClr>
+                <a:schemeClr val="tx2"/>
+              </a:buClr>
+              <a:buFont typeface="Arial" panose="020B0604020202020204" pitchFamily="34" charset="0"/>
+              <a:buChar char="•"/>
+              <a:defRPr sz="1600" kern="1200">
+                <a:solidFill>
+                  <a:schemeClr val="tx1">
+                    <a:lumMod val="65000"/>
+                    <a:lumOff val="35000"/>
+                  </a:schemeClr>
+                </a:solidFill>
+                <a:latin typeface="+mn-lt"/>
+                <a:ea typeface="+mn-ea"/>
+                <a:cs typeface="+mn-cs"/>
+              </a:defRPr>
+            </a:lvl3pPr>
+            <a:lvl4pPr marL="1600200" indent="-228600" algn="l" defTabSz="914400" rtl="0" eaLnBrk="1" latinLnBrk="0" hangingPunct="1">
+              <a:lnSpc>
+                <a:spcPct val="110000"/>
+              </a:lnSpc>
+              <a:spcBef>
+                <a:spcPts val="700"/>
+              </a:spcBef>
+              <a:buClr>
+                <a:schemeClr val="tx2"/>
+              </a:buClr>
+              <a:buFont typeface="Gill Sans MT" panose="020B0502020104020203" pitchFamily="34" charset="0"/>
+              <a:buChar char="–"/>
+              <a:defRPr sz="1400" kern="1200">
+                <a:solidFill>
+                  <a:schemeClr val="tx1">
+                    <a:lumMod val="65000"/>
+                    <a:lumOff val="35000"/>
+                  </a:schemeClr>
+                </a:solidFill>
+                <a:latin typeface="+mn-lt"/>
+                <a:ea typeface="+mn-ea"/>
+                <a:cs typeface="+mn-cs"/>
+              </a:defRPr>
+            </a:lvl4pPr>
+            <a:lvl5pPr marL="2057400" indent="-228600" algn="l" defTabSz="914400" rtl="0" eaLnBrk="1" latinLnBrk="0" hangingPunct="1">
+              <a:lnSpc>
+                <a:spcPct val="110000"/>
+              </a:lnSpc>
+              <a:spcBef>
+                <a:spcPts val="700"/>
+              </a:spcBef>
+              <a:buClr>
+                <a:schemeClr val="tx2"/>
+              </a:buClr>
+              <a:buFont typeface="Arial" panose="020B0604020202020204" pitchFamily="34" charset="0"/>
+              <a:buChar char="•"/>
+              <a:defRPr sz="1400" kern="1200">
+                <a:solidFill>
+                  <a:schemeClr val="tx1">
+                    <a:lumMod val="65000"/>
+                    <a:lumOff val="35000"/>
+                  </a:schemeClr>
+                </a:solidFill>
+                <a:latin typeface="+mn-lt"/>
+                <a:ea typeface="+mn-ea"/>
+                <a:cs typeface="+mn-cs"/>
+              </a:defRPr>
+            </a:lvl5pPr>
+            <a:lvl6pPr marL="2514600" indent="-228600" algn="l" defTabSz="914400" rtl="0" eaLnBrk="1" latinLnBrk="0" hangingPunct="1">
+              <a:lnSpc>
+                <a:spcPct val="110000"/>
+              </a:lnSpc>
+              <a:spcBef>
+                <a:spcPts val="700"/>
+              </a:spcBef>
+              <a:buClr>
+                <a:schemeClr val="tx2"/>
+              </a:buClr>
+              <a:buFont typeface="Gill Sans MT" panose="020B0502020104020203" pitchFamily="34" charset="0"/>
+              <a:buChar char="–"/>
+              <a:defRPr sz="1400" kern="1200">
+                <a:solidFill>
+                  <a:schemeClr val="tx1">
+                    <a:lumMod val="65000"/>
+                    <a:lumOff val="35000"/>
+                  </a:schemeClr>
+                </a:solidFill>
+                <a:latin typeface="+mn-lt"/>
+                <a:ea typeface="+mn-ea"/>
+                <a:cs typeface="+mn-cs"/>
+              </a:defRPr>
+            </a:lvl6pPr>
+            <a:lvl7pPr marL="2971800" indent="-228600" algn="l" defTabSz="914400" rtl="0" eaLnBrk="1" latinLnBrk="0" hangingPunct="1">
+              <a:lnSpc>
+                <a:spcPct val="110000"/>
+              </a:lnSpc>
+              <a:spcBef>
+                <a:spcPts val="700"/>
+              </a:spcBef>
+              <a:buClr>
+                <a:schemeClr val="tx2"/>
+              </a:buClr>
+              <a:buFont typeface="Arial" panose="020B0604020202020204" pitchFamily="34" charset="0"/>
+              <a:buChar char="•"/>
+              <a:defRPr sz="1400" kern="1200">
+                <a:solidFill>
+                  <a:schemeClr val="tx1">
+                    <a:lumMod val="65000"/>
+                    <a:lumOff val="35000"/>
+                  </a:schemeClr>
+                </a:solidFill>
+                <a:latin typeface="+mn-lt"/>
+                <a:ea typeface="+mn-ea"/>
+                <a:cs typeface="+mn-cs"/>
+              </a:defRPr>
+            </a:lvl7pPr>
+            <a:lvl8pPr marL="3429000" indent="-228600" algn="l" defTabSz="914400" rtl="0" eaLnBrk="1" latinLnBrk="0" hangingPunct="1">
+              <a:lnSpc>
+                <a:spcPct val="110000"/>
+              </a:lnSpc>
+              <a:spcBef>
+                <a:spcPts val="700"/>
+              </a:spcBef>
+              <a:buClr>
+                <a:schemeClr val="tx2"/>
+              </a:buClr>
+              <a:buFont typeface="Gill Sans MT" panose="020B0502020104020203" pitchFamily="34" charset="0"/>
+              <a:buChar char="–"/>
+              <a:defRPr sz="1400" kern="1200" baseline="0">
+                <a:solidFill>
+                  <a:schemeClr val="tx1">
+                    <a:lumMod val="65000"/>
+                    <a:lumOff val="35000"/>
+                  </a:schemeClr>
+                </a:solidFill>
+                <a:latin typeface="+mn-lt"/>
+                <a:ea typeface="+mn-ea"/>
+                <a:cs typeface="+mn-cs"/>
+              </a:defRPr>
+            </a:lvl8pPr>
+            <a:lvl9pPr marL="3886200" indent="-228600" algn="l" defTabSz="914400" rtl="0" eaLnBrk="1" latinLnBrk="0" hangingPunct="1">
+              <a:lnSpc>
+                <a:spcPct val="110000"/>
+              </a:lnSpc>
+              <a:spcBef>
+                <a:spcPts val="700"/>
+              </a:spcBef>
+              <a:buClr>
+                <a:schemeClr val="tx2"/>
+              </a:buClr>
+              <a:buFont typeface="Arial" panose="020B0604020202020204" pitchFamily="34" charset="0"/>
+              <a:buChar char="•"/>
+              <a:defRPr sz="1400" kern="1200" baseline="0">
+                <a:solidFill>
+                  <a:schemeClr val="tx1">
+                    <a:lumMod val="65000"/>
+                    <a:lumOff val="35000"/>
+                  </a:schemeClr>
+                </a:solidFill>
+                <a:latin typeface="+mn-lt"/>
+                <a:ea typeface="+mn-ea"/>
+                <a:cs typeface="+mn-cs"/>
+              </a:defRPr>
+            </a:lvl9pPr>
+          </a:lstStyle>
+          <a:p>
+            <a:pPr marL="0" indent="0">
+              <a:buNone/>
             </a:pPr>
             <a:r>
-              <a:rPr lang="ru-RU" sz="2000" dirty="0">
+              <a:rPr lang="ru-RU" dirty="0" smtClean="0"/>
+              <a:t>Мир </a:t>
+            </a:r>
+            <a:r>
+              <a:rPr lang="ru-RU" dirty="0"/>
+              <a:t>состоит из </a:t>
+            </a:r>
+            <a:r>
+              <a:rPr lang="ru-RU" b="1" dirty="0"/>
+              <a:t>трех этажей </a:t>
+            </a:r>
+            <a:r>
+              <a:rPr lang="ru-RU" dirty="0"/>
+              <a:t>ресторана с разными типами клиентов на </a:t>
+            </a:r>
+            <a:r>
+              <a:rPr lang="ru-RU" dirty="0" smtClean="0"/>
+              <a:t>каждом</a:t>
+            </a:r>
+          </a:p>
+        </p:txBody>
+      </p:sp>
+      <p:sp>
+        <p:nvSpPr>
+          <p:cNvPr id="14" name="Объект 2"/>
+          <p:cNvSpPr txBox="1">
+            <a:spLocks/>
+          </p:cNvSpPr>
+          <p:nvPr/>
+        </p:nvSpPr>
+        <p:spPr>
+          <a:xfrm>
+            <a:off x="4672481" y="5834368"/>
+            <a:ext cx="3437553" cy="1023632"/>
+          </a:xfrm>
+          <a:prstGeom prst="rect">
+            <a:avLst/>
+          </a:prstGeom>
+        </p:spPr>
+        <p:txBody>
+          <a:bodyPr vert="horz" lIns="91440" tIns="45720" rIns="91440" bIns="45720" rtlCol="0">
+            <a:normAutofit/>
+          </a:bodyPr>
+          <a:lstStyle>
+            <a:lvl1pPr marL="228600" indent="-228600" algn="l" defTabSz="914400" rtl="0" eaLnBrk="1" latinLnBrk="0" hangingPunct="1">
+              <a:lnSpc>
+                <a:spcPct val="110000"/>
+              </a:lnSpc>
+              <a:spcBef>
+                <a:spcPts val="700"/>
+              </a:spcBef>
+              <a:buClr>
+                <a:schemeClr val="tx2"/>
+              </a:buClr>
+              <a:buFont typeface="Arial" panose="020B0604020202020204" pitchFamily="34" charset="0"/>
+              <a:buChar char="•"/>
+              <a:defRPr sz="2000" kern="1200">
                 <a:solidFill>
-                  <a:prstClr val="black">
+                  <a:schemeClr val="tx1">
                     <a:lumMod val="65000"/>
                     <a:lumOff val="35000"/>
-                  </a:prstClr>
+                  </a:schemeClr>
                 </a:solidFill>
-              </a:rPr>
-              <a:t> </a:t>
-            </a:r>
-            <a:r>
-              <a:rPr lang="ru-RU" sz="2000" b="1" dirty="0">
+                <a:latin typeface="+mn-lt"/>
+                <a:ea typeface="+mn-ea"/>
+                <a:cs typeface="+mn-cs"/>
+              </a:defRPr>
+            </a:lvl1pPr>
+            <a:lvl2pPr marL="685800" indent="-228600" algn="l" defTabSz="914400" rtl="0" eaLnBrk="1" latinLnBrk="0" hangingPunct="1">
+              <a:lnSpc>
+                <a:spcPct val="110000"/>
+              </a:lnSpc>
+              <a:spcBef>
+                <a:spcPts val="700"/>
+              </a:spcBef>
+              <a:buClr>
+                <a:schemeClr val="tx2"/>
+              </a:buClr>
+              <a:buFont typeface="Gill Sans MT" panose="020B0502020104020203" pitchFamily="34" charset="0"/>
+              <a:buChar char="–"/>
+              <a:defRPr sz="1800" kern="1200">
                 <a:solidFill>
-                  <a:prstClr val="black">
+                  <a:schemeClr val="tx1">
                     <a:lumMod val="65000"/>
                     <a:lumOff val="35000"/>
-                  </a:prstClr>
+                  </a:schemeClr>
                 </a:solidFill>
-              </a:rPr>
-              <a:t>«Побег»</a:t>
-            </a:r>
-            <a:r>
-              <a:rPr lang="ru-RU" sz="2000" dirty="0">
+                <a:latin typeface="+mn-lt"/>
+                <a:ea typeface="+mn-ea"/>
+                <a:cs typeface="+mn-cs"/>
+              </a:defRPr>
+            </a:lvl2pPr>
+            <a:lvl3pPr marL="1143000" indent="-228600" algn="l" defTabSz="914400" rtl="0" eaLnBrk="1" latinLnBrk="0" hangingPunct="1">
+              <a:lnSpc>
+                <a:spcPct val="110000"/>
+              </a:lnSpc>
+              <a:spcBef>
+                <a:spcPts val="700"/>
+              </a:spcBef>
+              <a:buClr>
+                <a:schemeClr val="tx2"/>
+              </a:buClr>
+              <a:buFont typeface="Arial" panose="020B0604020202020204" pitchFamily="34" charset="0"/>
+              <a:buChar char="•"/>
+              <a:defRPr sz="1600" kern="1200">
                 <a:solidFill>
-                  <a:prstClr val="black">
+                  <a:schemeClr val="tx1">
                     <a:lumMod val="65000"/>
                     <a:lumOff val="35000"/>
-                  </a:prstClr>
+                  </a:schemeClr>
                 </a:solidFill>
-              </a:rPr>
-              <a:t> - получить ключ от особого посетителя на втором этаже и сбежать через чёрный </a:t>
-            </a:r>
-            <a:r>
-              <a:rPr lang="ru-RU" sz="2000" dirty="0" smtClean="0">
+                <a:latin typeface="+mn-lt"/>
+                <a:ea typeface="+mn-ea"/>
+                <a:cs typeface="+mn-cs"/>
+              </a:defRPr>
+            </a:lvl3pPr>
+            <a:lvl4pPr marL="1600200" indent="-228600" algn="l" defTabSz="914400" rtl="0" eaLnBrk="1" latinLnBrk="0" hangingPunct="1">
+              <a:lnSpc>
+                <a:spcPct val="110000"/>
+              </a:lnSpc>
+              <a:spcBef>
+                <a:spcPts val="700"/>
+              </a:spcBef>
+              <a:buClr>
+                <a:schemeClr val="tx2"/>
+              </a:buClr>
+              <a:buFont typeface="Gill Sans MT" panose="020B0502020104020203" pitchFamily="34" charset="0"/>
+              <a:buChar char="–"/>
+              <a:defRPr sz="1400" kern="1200">
                 <a:solidFill>
-                  <a:prstClr val="black">
+                  <a:schemeClr val="tx1">
                     <a:lumMod val="65000"/>
                     <a:lumOff val="35000"/>
-                  </a:prstClr>
+                  </a:schemeClr>
                 </a:solidFill>
-              </a:rPr>
-              <a:t>ход</a:t>
+                <a:latin typeface="+mn-lt"/>
+                <a:ea typeface="+mn-ea"/>
+                <a:cs typeface="+mn-cs"/>
+              </a:defRPr>
+            </a:lvl4pPr>
+            <a:lvl5pPr marL="2057400" indent="-228600" algn="l" defTabSz="914400" rtl="0" eaLnBrk="1" latinLnBrk="0" hangingPunct="1">
+              <a:lnSpc>
+                <a:spcPct val="110000"/>
+              </a:lnSpc>
+              <a:spcBef>
+                <a:spcPts val="700"/>
+              </a:spcBef>
+              <a:buClr>
+                <a:schemeClr val="tx2"/>
+              </a:buClr>
+              <a:buFont typeface="Arial" panose="020B0604020202020204" pitchFamily="34" charset="0"/>
+              <a:buChar char="•"/>
+              <a:defRPr sz="1400" kern="1200">
+                <a:solidFill>
+                  <a:schemeClr val="tx1">
+                    <a:lumMod val="65000"/>
+                    <a:lumOff val="35000"/>
+                  </a:schemeClr>
+                </a:solidFill>
+                <a:latin typeface="+mn-lt"/>
+                <a:ea typeface="+mn-ea"/>
+                <a:cs typeface="+mn-cs"/>
+              </a:defRPr>
+            </a:lvl5pPr>
+            <a:lvl6pPr marL="2514600" indent="-228600" algn="l" defTabSz="914400" rtl="0" eaLnBrk="1" latinLnBrk="0" hangingPunct="1">
+              <a:lnSpc>
+                <a:spcPct val="110000"/>
+              </a:lnSpc>
+              <a:spcBef>
+                <a:spcPts val="700"/>
+              </a:spcBef>
+              <a:buClr>
+                <a:schemeClr val="tx2"/>
+              </a:buClr>
+              <a:buFont typeface="Gill Sans MT" panose="020B0502020104020203" pitchFamily="34" charset="0"/>
+              <a:buChar char="–"/>
+              <a:defRPr sz="1400" kern="1200">
+                <a:solidFill>
+                  <a:schemeClr val="tx1">
+                    <a:lumMod val="65000"/>
+                    <a:lumOff val="35000"/>
+                  </a:schemeClr>
+                </a:solidFill>
+                <a:latin typeface="+mn-lt"/>
+                <a:ea typeface="+mn-ea"/>
+                <a:cs typeface="+mn-cs"/>
+              </a:defRPr>
+            </a:lvl6pPr>
+            <a:lvl7pPr marL="2971800" indent="-228600" algn="l" defTabSz="914400" rtl="0" eaLnBrk="1" latinLnBrk="0" hangingPunct="1">
+              <a:lnSpc>
+                <a:spcPct val="110000"/>
+              </a:lnSpc>
+              <a:spcBef>
+                <a:spcPts val="700"/>
+              </a:spcBef>
+              <a:buClr>
+                <a:schemeClr val="tx2"/>
+              </a:buClr>
+              <a:buFont typeface="Arial" panose="020B0604020202020204" pitchFamily="34" charset="0"/>
+              <a:buChar char="•"/>
+              <a:defRPr sz="1400" kern="1200">
+                <a:solidFill>
+                  <a:schemeClr val="tx1">
+                    <a:lumMod val="65000"/>
+                    <a:lumOff val="35000"/>
+                  </a:schemeClr>
+                </a:solidFill>
+                <a:latin typeface="+mn-lt"/>
+                <a:ea typeface="+mn-ea"/>
+                <a:cs typeface="+mn-cs"/>
+              </a:defRPr>
+            </a:lvl7pPr>
+            <a:lvl8pPr marL="3429000" indent="-228600" algn="l" defTabSz="914400" rtl="0" eaLnBrk="1" latinLnBrk="0" hangingPunct="1">
+              <a:lnSpc>
+                <a:spcPct val="110000"/>
+              </a:lnSpc>
+              <a:spcBef>
+                <a:spcPts val="700"/>
+              </a:spcBef>
+              <a:buClr>
+                <a:schemeClr val="tx2"/>
+              </a:buClr>
+              <a:buFont typeface="Gill Sans MT" panose="020B0502020104020203" pitchFamily="34" charset="0"/>
+              <a:buChar char="–"/>
+              <a:defRPr sz="1400" kern="1200" baseline="0">
+                <a:solidFill>
+                  <a:schemeClr val="tx1">
+                    <a:lumMod val="65000"/>
+                    <a:lumOff val="35000"/>
+                  </a:schemeClr>
+                </a:solidFill>
+                <a:latin typeface="+mn-lt"/>
+                <a:ea typeface="+mn-ea"/>
+                <a:cs typeface="+mn-cs"/>
+              </a:defRPr>
+            </a:lvl8pPr>
+            <a:lvl9pPr marL="3886200" indent="-228600" algn="l" defTabSz="914400" rtl="0" eaLnBrk="1" latinLnBrk="0" hangingPunct="1">
+              <a:lnSpc>
+                <a:spcPct val="110000"/>
+              </a:lnSpc>
+              <a:spcBef>
+                <a:spcPts val="700"/>
+              </a:spcBef>
+              <a:buClr>
+                <a:schemeClr val="tx2"/>
+              </a:buClr>
+              <a:buFont typeface="Arial" panose="020B0604020202020204" pitchFamily="34" charset="0"/>
+              <a:buChar char="•"/>
+              <a:defRPr sz="1400" kern="1200" baseline="0">
+                <a:solidFill>
+                  <a:schemeClr val="tx1">
+                    <a:lumMod val="65000"/>
+                    <a:lumOff val="35000"/>
+                  </a:schemeClr>
+                </a:solidFill>
+                <a:latin typeface="+mn-lt"/>
+                <a:ea typeface="+mn-ea"/>
+                <a:cs typeface="+mn-cs"/>
+              </a:defRPr>
+            </a:lvl9pPr>
+          </a:lstStyle>
+          <a:p>
+            <a:pPr marL="0" indent="0">
+              <a:buNone/>
+            </a:pPr>
+            <a:r>
+              <a:rPr lang="ru-RU" b="1" dirty="0" smtClean="0"/>
+              <a:t>Итогом игры являются четыре различные концовки</a:t>
             </a:r>
-            <a:endParaRPr lang="ru-RU" sz="2000" dirty="0">
-              <a:solidFill>
-                <a:prstClr val="black">
-                  <a:lumMod val="65000"/>
-                  <a:lumOff val="35000"/>
-                </a:prstClr>
-              </a:solidFill>
-            </a:endParaRPr>
+            <a:endParaRPr lang="ru-RU" b="1" dirty="0"/>
           </a:p>
         </p:txBody>
       </p:sp>
     </p:spTree>
     <p:extLst>
       <p:ext uri="{BB962C8B-B14F-4D97-AF65-F5344CB8AC3E}">
-        <p14:creationId xmlns:p14="http://schemas.microsoft.com/office/powerpoint/2010/main" val="444275001"/>
-      </p:ext>
-    </p:extLst>
-  </p:cSld>
-  <p:clrMapOvr>
-    <a:masterClrMapping/>
-  </p:clrMapOvr>
-  <p:timing>
-    <p:tnLst>
-      <p:par>
-        <p:cTn id="1" dur="indefinite" restart="never" nodeType="tmRoot"/>
-      </p:par>
-    </p:tnLst>
-  </p:timing>
-</p:sld>
-</file>
-
-<file path=ppt/slides/slide6.xml><?xml version="1.0" encoding="utf-8"?>
-<p:sld xmlns:a="http://schemas.openxmlformats.org/drawingml/2006/main" xmlns:r="http://schemas.openxmlformats.org/officeDocument/2006/relationships" xmlns:p="http://schemas.openxmlformats.org/presentationml/2006/main">
-  <p:cSld>
-    <p:spTree>
-      <p:nvGrpSpPr>
-        <p:cNvPr id="1" name=""/>
-        <p:cNvGrpSpPr/>
-        <p:nvPr/>
-      </p:nvGrpSpPr>
-      <p:grpSpPr>
-        <a:xfrm>
-          <a:off x="0" y="0"/>
-          <a:ext cx="0" cy="0"/>
-          <a:chOff x="0" y="0"/>
-          <a:chExt cx="0" cy="0"/>
-        </a:xfrm>
-      </p:grpSpPr>
-      <p:sp>
-        <p:nvSpPr>
-          <p:cNvPr id="2" name="Заголовок 1"/>
-          <p:cNvSpPr>
-            <a:spLocks noGrp="1"/>
-          </p:cNvSpPr>
-          <p:nvPr>
-            <p:ph type="title"/>
-          </p:nvPr>
-        </p:nvSpPr>
-        <p:spPr/>
-        <p:txBody>
-          <a:bodyPr/>
-          <a:lstStyle/>
-          <a:p>
-            <a:r>
-              <a:rPr lang="ru-RU" dirty="0" smtClean="0"/>
-              <a:t>Спасибо за внимание</a:t>
-            </a:r>
-            <a:endParaRPr lang="ru-RU" dirty="0"/>
-          </a:p>
-        </p:txBody>
-      </p:sp>
-      <p:sp>
-        <p:nvSpPr>
-          <p:cNvPr id="3" name="Текст 2"/>
-          <p:cNvSpPr>
-            <a:spLocks noGrp="1"/>
-          </p:cNvSpPr>
-          <p:nvPr>
-            <p:ph type="body" idx="1"/>
-          </p:nvPr>
-        </p:nvSpPr>
-        <p:spPr/>
-        <p:txBody>
-          <a:bodyPr/>
-          <a:lstStyle/>
-          <a:p>
-            <a:endParaRPr lang="ru-RU"/>
-          </a:p>
-        </p:txBody>
-      </p:sp>
-    </p:spTree>
-    <p:extLst>
-      <p:ext uri="{BB962C8B-B14F-4D97-AF65-F5344CB8AC3E}">
-        <p14:creationId xmlns:p14="http://schemas.microsoft.com/office/powerpoint/2010/main" val="1260416513"/>
+        <p14:creationId xmlns:p14="http://schemas.microsoft.com/office/powerpoint/2010/main" val="1255161127"/>
       </p:ext>
     </p:extLst>
   </p:cSld>
